--- a/Presentacion/Proyecto_Cero_Generador_DDS.pptx
+++ b/Presentacion/Proyecto_Cero_Generador_DDS.pptx
@@ -5,7 +5,7 @@
     <p:sldMasterId id="2147483648" r:id="rId1"/>
   </p:sldMasterIdLst>
   <p:notesMasterIdLst>
-    <p:notesMasterId r:id="rId16"/>
+    <p:notesMasterId r:id="rId17"/>
   </p:notesMasterIdLst>
   <p:sldIdLst>
     <p:sldId id="256" r:id="rId2"/>
@@ -19,9 +19,10 @@
     <p:sldId id="263" r:id="rId10"/>
     <p:sldId id="271" r:id="rId11"/>
     <p:sldId id="272" r:id="rId12"/>
-    <p:sldId id="273" r:id="rId13"/>
-    <p:sldId id="274" r:id="rId14"/>
-    <p:sldId id="268" r:id="rId15"/>
+    <p:sldId id="276" r:id="rId13"/>
+    <p:sldId id="273" r:id="rId14"/>
+    <p:sldId id="274" r:id="rId15"/>
+    <p:sldId id="268" r:id="rId16"/>
   </p:sldIdLst>
   <p:sldSz cx="12192000" cy="6858000"/>
   <p:notesSz cx="6858000" cy="9144000"/>
@@ -121,6 +122,29 @@
     </a:lvl9pPr>
   </p:defaultTextStyle>
   <p:extLst>
+    <p:ext uri="{521415D9-36F7-43E2-AB2F-B90AF26B5E84}">
+      <p14:sectionLst xmlns:p14="http://schemas.microsoft.com/office/powerpoint/2010/main">
+        <p14:section name="Sección predeterminada" id="{CDDD4227-95DB-4480-B478-01D5B31299BD}">
+          <p14:sldIdLst>
+            <p14:sldId id="256"/>
+            <p14:sldId id="257"/>
+            <p14:sldId id="258"/>
+            <p14:sldId id="259"/>
+            <p14:sldId id="260"/>
+            <p14:sldId id="261"/>
+            <p14:sldId id="270"/>
+            <p14:sldId id="262"/>
+            <p14:sldId id="263"/>
+            <p14:sldId id="271"/>
+            <p14:sldId id="272"/>
+            <p14:sldId id="276"/>
+            <p14:sldId id="273"/>
+            <p14:sldId id="274"/>
+            <p14:sldId id="268"/>
+          </p14:sldIdLst>
+        </p14:section>
+      </p14:sectionLst>
+    </p:ext>
     <p:ext uri="{EFAFB233-063F-42B5-8137-9DF3F51BA10A}">
       <p15:sldGuideLst xmlns:p15="http://schemas.microsoft.com/office/powerpoint/2012/main">
         <p15:guide id="1" orient="horz" pos="2160">
@@ -139,41 +163,12 @@
 </p:presentation>
 </file>
 
-<file path=ppt/changesInfos/changesInfo1.xml><?xml version="1.0" encoding="utf-8"?>
-<pc:chgInfo xmlns:a="http://schemas.openxmlformats.org/drawingml/2006/main" xmlns:r="http://schemas.openxmlformats.org/officeDocument/2006/relationships" xmlns:ac="http://schemas.microsoft.com/office/drawing/2013/main/command" xmlns:pc="http://schemas.microsoft.com/office/powerpoint/2013/main/command">
-  <pc:docChgLst>
-    <pc:chgData name="Esteban Fernández Madau" userId="5c1eec726709364b" providerId="LiveId" clId="{020048B4-3062-4DF0-AD1F-9D39CA2D3DF1}"/>
-    <pc:docChg chg="modSld">
-      <pc:chgData name="Esteban Fernández Madau" userId="5c1eec726709364b" providerId="LiveId" clId="{020048B4-3062-4DF0-AD1F-9D39CA2D3DF1}" dt="2026-09-08T17:10:41.641" v="12" actId="20577"/>
-      <pc:docMkLst>
-        <pc:docMk/>
-      </pc:docMkLst>
-      <pc:sldChg chg="modSp mod">
-        <pc:chgData name="Esteban Fernández Madau" userId="5c1eec726709364b" providerId="LiveId" clId="{020048B4-3062-4DF0-AD1F-9D39CA2D3DF1}" dt="2026-09-08T17:10:41.641" v="12" actId="20577"/>
-        <pc:sldMkLst>
-          <pc:docMk/>
-          <pc:sldMk cId="0" sldId="268"/>
-        </pc:sldMkLst>
-        <pc:spChg chg="mod">
-          <ac:chgData name="Esteban Fernández Madau" userId="5c1eec726709364b" providerId="LiveId" clId="{020048B4-3062-4DF0-AD1F-9D39CA2D3DF1}" dt="2026-09-08T17:10:20.393" v="11" actId="20577"/>
-          <ac:spMkLst>
-            <pc:docMk/>
-            <pc:sldMk cId="0" sldId="268"/>
-            <ac:spMk id="8" creationId="{00000000-0000-0000-0000-000000000000}"/>
-          </ac:spMkLst>
-        </pc:spChg>
-        <pc:spChg chg="mod">
-          <ac:chgData name="Esteban Fernández Madau" userId="5c1eec726709364b" providerId="LiveId" clId="{020048B4-3062-4DF0-AD1F-9D39CA2D3DF1}" dt="2026-09-08T17:10:41.641" v="12" actId="20577"/>
-          <ac:spMkLst>
-            <pc:docMk/>
-            <pc:sldMk cId="0" sldId="268"/>
-            <ac:spMk id="11" creationId="{00000000-0000-0000-0000-000000000000}"/>
-          </ac:spMkLst>
-        </pc:spChg>
-      </pc:sldChg>
-    </pc:docChg>
-  </pc:docChgLst>
-</pc:chgInfo>
+<file path=ppt/revisionInfo.xml><?xml version="1.0" encoding="utf-8"?>
+<p1510:revInfo xmlns:a="http://schemas.openxmlformats.org/drawingml/2006/main" xmlns:r="http://schemas.openxmlformats.org/officeDocument/2006/relationships" xmlns:p1510="http://schemas.microsoft.com/office/powerpoint/2015/10/main">
+  <p1510:revLst>
+    <p1510:client id="{473619F8-93DD-45F6-90B2-4C7A2AC67FDA}" v="14" dt="2026-09-09T15:32:04.159"/>
+  </p1510:revLst>
+</p1510:revInfo>
 </file>
 
 <file path=ppt/notesMasters/notesMaster1.xml><?xml version="1.0" encoding="utf-8"?>
@@ -258,7 +253,7 @@
           <a:p>
             <a:fld id="{BB3C0653-4148-4787-A0E6-5D6007E52227}" type="datetimeFigureOut">
               <a:rPr lang="es-AR" smtClean="0"/>
-              <a:t>8/9/2026</a:t>
+              <a:t>9/9/2026</a:t>
             </a:fld>
             <a:endParaRPr lang="es-AR"/>
           </a:p>
@@ -570,331 +565,6 @@
           <a:bodyPr/>
           <a:lstStyle/>
           <a:p>
-            <a:r>
-              <a:rPr lang="es-AR" dirty="0"/>
-              <a:t>-  Acumulador de fase:  </a:t>
-            </a:r>
-            <a:r>
-              <a:rPr lang="es-AR" dirty="0" err="1"/>
-              <a:t>acc</a:t>
-            </a:r>
-            <a:r>
-              <a:rPr lang="es-AR" dirty="0"/>
-              <a:t> (32 bits) -&gt; </a:t>
-            </a:r>
-            <a:r>
-              <a:rPr lang="es-MX" dirty="0"/>
-              <a:t> Guarda la fase actual de la onda. Representa el ángulo 0…2π mapeado a 0…2³².</a:t>
-            </a:r>
-            <a:br>
-              <a:rPr lang="es-MX" dirty="0"/>
-            </a:br>
-            <a:r>
-              <a:rPr lang="es-MX" dirty="0"/>
-              <a:t>-  FTW (paso):  </a:t>
-            </a:r>
-            <a:r>
-              <a:rPr lang="es-MX" dirty="0" err="1"/>
-              <a:t>ftw</a:t>
-            </a:r>
-            <a:r>
-              <a:rPr lang="es-MX" dirty="0"/>
-              <a:t> -&gt;  Cuánto avanza la fase en cada muestra. Define la frecuencia. </a:t>
-            </a:r>
-            <a:r>
-              <a:rPr lang="es-MX" dirty="0" err="1"/>
-              <a:t>ftw</a:t>
-            </a:r>
-            <a:r>
-              <a:rPr lang="es-MX" dirty="0"/>
-              <a:t> = fout·2³²/fs.</a:t>
-            </a:r>
-            <a:br>
-              <a:rPr lang="es-MX" dirty="0"/>
-            </a:br>
-            <a:r>
-              <a:rPr lang="es-MX" dirty="0"/>
-              <a:t>-  Conversión </a:t>
-            </a:r>
-            <a:r>
-              <a:rPr lang="es-MX" dirty="0" err="1"/>
-              <a:t>fase→amplitud</a:t>
-            </a:r>
-            <a:r>
-              <a:rPr lang="es-MX" dirty="0"/>
-              <a:t>: </a:t>
-            </a:r>
-            <a:r>
-              <a:rPr lang="es-MX" dirty="0" err="1"/>
-              <a:t>idx</a:t>
-            </a:r>
-            <a:r>
-              <a:rPr lang="es-MX" dirty="0"/>
-              <a:t> = </a:t>
-            </a:r>
-            <a:r>
-              <a:rPr lang="es-MX" dirty="0" err="1"/>
-              <a:t>acc</a:t>
-            </a:r>
-            <a:r>
-              <a:rPr lang="es-MX" dirty="0"/>
-              <a:t>&gt;&gt;19 + tabla[</a:t>
-            </a:r>
-            <a:r>
-              <a:rPr lang="es-MX" dirty="0" err="1"/>
-              <a:t>idx</a:t>
-            </a:r>
-            <a:r>
-              <a:rPr lang="es-MX" dirty="0"/>
-              <a:t>] -&gt;  Toma la fase y la convierte en el valor de la senoidal (mirando la tabla).</a:t>
-            </a:r>
-            <a:br>
-              <a:rPr lang="es-MX" dirty="0"/>
-            </a:br>
-            <a:br>
-              <a:rPr lang="es-MX" dirty="0"/>
-            </a:br>
-            <a:r>
-              <a:rPr lang="es-MX" dirty="0" err="1"/>
-              <a:t>Fs</a:t>
-            </a:r>
-            <a:r>
-              <a:rPr lang="es-MX" dirty="0"/>
-              <a:t>/N -&gt; 48k/2^13 = 5.86 </a:t>
-            </a:r>
-            <a:r>
-              <a:rPr lang="es-MX" dirty="0" err="1"/>
-              <a:t>hz</a:t>
-            </a:r>
-            <a:br>
-              <a:rPr lang="es-MX" dirty="0"/>
-            </a:br>
-            <a:r>
-              <a:rPr lang="es-MX" dirty="0" err="1"/>
-              <a:t>Fs</a:t>
-            </a:r>
-            <a:r>
-              <a:rPr lang="es-MX" dirty="0"/>
-              <a:t>/2^32 -&gt; 48k/2^32 = 0.00001hz </a:t>
-            </a:r>
-            <a:br>
-              <a:rPr lang="es-MX" dirty="0"/>
-            </a:br>
-            <a:r>
-              <a:rPr lang="es-MX" dirty="0"/>
-              <a:t>al final es la misma cuenta porque luego en el índice </a:t>
-            </a:r>
-            <a:r>
-              <a:rPr lang="es-MX" dirty="0" err="1"/>
-              <a:t>idx</a:t>
-            </a:r>
-            <a:r>
-              <a:rPr lang="es-MX" dirty="0"/>
-              <a:t> = </a:t>
-            </a:r>
-            <a:r>
-              <a:rPr lang="es-MX" dirty="0" err="1"/>
-              <a:t>acc</a:t>
-            </a:r>
-            <a:r>
-              <a:rPr lang="es-MX" dirty="0"/>
-              <a:t> &gt;&gt; 19 se toman los 13 bits mas altos y se ignoran los 19 bits mas bajos.</a:t>
-            </a:r>
-            <a:br>
-              <a:rPr lang="es-MX" dirty="0"/>
-            </a:br>
-            <a:br>
-              <a:rPr lang="es-MX" dirty="0"/>
-            </a:br>
-            <a:br>
-              <a:rPr lang="es-MX" dirty="0"/>
-            </a:br>
-            <a:r>
-              <a:rPr lang="es-MX" dirty="0"/>
-              <a:t>La tabla tiene UN ciclo completo de la senoidal, y el DAC saca una muestra cada tiempo fijo (1/</a:t>
-            </a:r>
-            <a:r>
-              <a:rPr lang="es-MX" dirty="0" err="1"/>
-              <a:t>fs</a:t>
-            </a:r>
-            <a:r>
-              <a:rPr lang="es-MX" dirty="0"/>
-              <a:t>). La frecuencia de salida es cuántos ciclos </a:t>
-            </a:r>
-            <a:r>
-              <a:rPr lang="es-MX" dirty="0" err="1"/>
-              <a:t>completás</a:t>
-            </a:r>
-            <a:r>
-              <a:rPr lang="es-MX" dirty="0"/>
-              <a:t> por segundo, o sea qué tan rápido </a:t>
-            </a:r>
-            <a:r>
-              <a:rPr lang="es-MX" dirty="0" err="1"/>
-              <a:t>recorrés</a:t>
-            </a:r>
-            <a:r>
-              <a:rPr lang="es-MX" dirty="0"/>
-              <a:t> la tabla. Si el paso es más grande, </a:t>
-            </a:r>
-            <a:r>
-              <a:rPr lang="es-MX" dirty="0" err="1"/>
-              <a:t>terminás</a:t>
-            </a:r>
-            <a:r>
-              <a:rPr lang="es-MX" dirty="0"/>
-              <a:t> la tabla (un ciclo) en menos muestras → cada ciclo dura menos → más frecuencia.</a:t>
-            </a:r>
-            <a:br>
-              <a:rPr lang="es-MX" dirty="0"/>
-            </a:br>
-            <a:br>
-              <a:rPr lang="es-MX" dirty="0"/>
-            </a:br>
-            <a:r>
-              <a:rPr lang="es-MX" dirty="0"/>
-              <a:t>El razonamiento con números</a:t>
-            </a:r>
-            <a:br>
-              <a:rPr lang="es-MX" dirty="0"/>
-            </a:br>
-            <a:br>
-              <a:rPr lang="es-MX" dirty="0"/>
-            </a:br>
-            <a:r>
-              <a:rPr lang="es-MX" dirty="0"/>
-              <a:t>Dos cosas fijas: la tabla tiene N = 8192 puntos (un ciclo) y el DAC tira muestras a </a:t>
-            </a:r>
-            <a:r>
-              <a:rPr lang="es-MX" dirty="0" err="1"/>
-              <a:t>fs</a:t>
-            </a:r>
-            <a:r>
-              <a:rPr lang="es-MX" dirty="0"/>
-              <a:t> = 48 kHz (ritmo constante, no cambia nunca).</a:t>
-            </a:r>
-            <a:br>
-              <a:rPr lang="es-MX" dirty="0"/>
-            </a:br>
-            <a:br>
-              <a:rPr lang="es-MX" dirty="0"/>
-            </a:br>
-            <a:r>
-              <a:rPr lang="es-MX" dirty="0"/>
-              <a:t>Un período de la señal = el tiempo que </a:t>
-            </a:r>
-            <a:r>
-              <a:rPr lang="es-MX" dirty="0" err="1"/>
-              <a:t>tardás</a:t>
-            </a:r>
-            <a:r>
-              <a:rPr lang="es-MX" dirty="0"/>
-              <a:t> en recorrer los 8192 puntos:</a:t>
-            </a:r>
-            <a:br>
-              <a:rPr lang="es-MX" dirty="0"/>
-            </a:br>
-            <a:br>
-              <a:rPr lang="es-MX" dirty="0"/>
-            </a:br>
-            <a:r>
-              <a:rPr lang="es-MX" dirty="0"/>
-              <a:t>muestras por ciclo = N / paso</a:t>
-            </a:r>
-            <a:br>
-              <a:rPr lang="es-MX" dirty="0"/>
-            </a:br>
-            <a:br>
-              <a:rPr lang="es-MX" dirty="0"/>
-            </a:br>
-            <a:r>
-              <a:rPr lang="es-MX" dirty="0"/>
-              <a:t>período           = (N / paso) / </a:t>
-            </a:r>
-            <a:r>
-              <a:rPr lang="es-MX" dirty="0" err="1"/>
-              <a:t>fs</a:t>
-            </a:r>
-            <a:r>
-              <a:rPr lang="es-MX" dirty="0"/>
-              <a:t>   [segundos]</a:t>
-            </a:r>
-            <a:br>
-              <a:rPr lang="es-MX" dirty="0"/>
-            </a:br>
-            <a:br>
-              <a:rPr lang="es-MX" dirty="0"/>
-            </a:br>
-            <a:r>
-              <a:rPr lang="es-MX" dirty="0"/>
-              <a:t>frecuencia        = 1 / período = paso · </a:t>
-            </a:r>
-            <a:r>
-              <a:rPr lang="es-MX" dirty="0" err="1"/>
-              <a:t>fs</a:t>
-            </a:r>
-            <a:r>
-              <a:rPr lang="es-MX" dirty="0"/>
-              <a:t> / N</a:t>
-            </a:r>
-            <a:br>
-              <a:rPr lang="es-MX" dirty="0"/>
-            </a:br>
-            <a:br>
-              <a:rPr lang="es-MX" dirty="0"/>
-            </a:br>
-            <a:r>
-              <a:rPr lang="es-MX" dirty="0"/>
-              <a:t>Entonces:</a:t>
-            </a:r>
-            <a:br>
-              <a:rPr lang="es-MX" dirty="0"/>
-            </a:br>
-            <a:br>
-              <a:rPr lang="es-MX" dirty="0"/>
-            </a:br>
-            <a:r>
-              <a:rPr lang="es-MX" dirty="0" err="1"/>
-              <a:t>fout</a:t>
-            </a:r>
-            <a:r>
-              <a:rPr lang="es-MX" dirty="0"/>
-              <a:t> = paso · </a:t>
-            </a:r>
-            <a:r>
-              <a:rPr lang="es-MX" dirty="0" err="1"/>
-              <a:t>fs</a:t>
-            </a:r>
-            <a:r>
-              <a:rPr lang="es-MX" dirty="0"/>
-              <a:t> / N</a:t>
-            </a:r>
-            <a:br>
-              <a:rPr lang="es-MX" dirty="0"/>
-            </a:br>
-            <a:br>
-              <a:rPr lang="es-MX" dirty="0"/>
-            </a:br>
-            <a:r>
-              <a:rPr lang="es-MX" dirty="0"/>
-              <a:t>La frecuencia es directamente proporcional al paso. Doble paso → doble frecuencia. Eso es lo que </a:t>
-            </a:r>
-            <a:r>
-              <a:rPr lang="es-MX" dirty="0" err="1"/>
-              <a:t>cambiás</a:t>
-            </a:r>
-            <a:r>
-              <a:rPr lang="es-MX" dirty="0"/>
-              <a:t> cuando </a:t>
-            </a:r>
-            <a:r>
-              <a:rPr lang="es-MX" dirty="0" err="1"/>
-              <a:t>mandás</a:t>
-            </a:r>
-            <a:r>
-              <a:rPr lang="es-MX" dirty="0"/>
-              <a:t> un número por la terminal</a:t>
-            </a:r>
             <a:endParaRPr lang="es-AR" dirty="0"/>
           </a:p>
         </p:txBody>
@@ -916,7 +586,7 @@
           <a:p>
             <a:fld id="{7AA72860-7798-4D93-A7EE-515E361AE3C6}" type="slidenum">
               <a:rPr lang="es-AR" smtClean="0"/>
-              <a:t>6</a:t>
+              <a:t>5</a:t>
             </a:fld>
             <a:endParaRPr lang="es-AR"/>
           </a:p>
@@ -925,7 +595,7 @@
     </p:spTree>
     <p:extLst>
       <p:ext uri="{BB962C8B-B14F-4D97-AF65-F5344CB8AC3E}">
-        <p14:creationId xmlns:p14="http://schemas.microsoft.com/office/powerpoint/2010/main" val="156473846"/>
+        <p14:creationId xmlns:p14="http://schemas.microsoft.com/office/powerpoint/2010/main" val="1042438057"/>
       </p:ext>
     </p:extLst>
   </p:cSld>
@@ -981,135 +651,328 @@
           <a:p>
             <a:r>
               <a:rPr lang="es-AR" dirty="0"/>
-              <a:t>Escalado: </a:t>
+              <a:t>-  Acumulador de fase:  </a:t>
+            </a:r>
+            <a:r>
+              <a:rPr lang="es-AR" dirty="0" err="1"/>
+              <a:t>acc</a:t>
+            </a:r>
+            <a:r>
+              <a:rPr lang="es-AR" dirty="0"/>
+              <a:t> (32 bits) -&gt; </a:t>
+            </a:r>
+            <a:r>
+              <a:rPr lang="es-MX" dirty="0"/>
+              <a:t> Guarda la fase actual de la onda. Representa el ángulo 0…2π mapeado a 0…2³².</a:t>
             </a:r>
             <a:br>
-              <a:rPr lang="es-AR" dirty="0"/>
+              <a:rPr lang="es-MX" dirty="0"/>
             </a:br>
             <a:r>
-              <a:rPr lang="es-AR" dirty="0"/>
-              <a:t>- Se resta 2048 para centrar la altura en 0, ahora va de -2048 a +2047.</a:t>
+              <a:rPr lang="es-MX" dirty="0"/>
+              <a:t>-  FTW (paso):  </a:t>
+            </a:r>
+            <a:r>
+              <a:rPr lang="es-MX" dirty="0" err="1"/>
+              <a:t>ftw</a:t>
+            </a:r>
+            <a:r>
+              <a:rPr lang="es-MX" dirty="0"/>
+              <a:t> -&gt;  Cuánto avanza la fase en cada muestra. Define la frecuencia. </a:t>
+            </a:r>
+            <a:r>
+              <a:rPr lang="es-MX" dirty="0" err="1"/>
+              <a:t>ftw</a:t>
+            </a:r>
+            <a:r>
+              <a:rPr lang="es-MX" dirty="0"/>
+              <a:t> = fout·2³²/fs.</a:t>
             </a:r>
             <a:br>
-              <a:rPr lang="es-AR" dirty="0"/>
+              <a:rPr lang="es-MX" dirty="0"/>
             </a:br>
             <a:r>
-              <a:rPr lang="es-AR" dirty="0"/>
-              <a:t>- Se multiplica por la ganancia </a:t>
-            </a:r>
-            <a:r>
-              <a:rPr lang="es-AR" dirty="0" err="1"/>
-              <a:t>amp</a:t>
-            </a:r>
-            <a:r>
-              <a:rPr lang="es-AR" dirty="0"/>
-              <a:t>/2048, si </a:t>
-            </a:r>
-            <a:r>
-              <a:rPr lang="es-AR" dirty="0" err="1"/>
-              <a:t>amp</a:t>
-            </a:r>
-            <a:r>
-              <a:rPr lang="es-AR" dirty="0"/>
-              <a:t> vale 20448 gana 1, si vale 1024 0,5 y si vale 0 salida nula.</a:t>
+              <a:rPr lang="es-MX" dirty="0"/>
+              <a:t>-  Conversión </a:t>
+            </a:r>
+            <a:r>
+              <a:rPr lang="es-MX" dirty="0" err="1"/>
+              <a:t>fase→amplitud</a:t>
+            </a:r>
+            <a:r>
+              <a:rPr lang="es-MX" dirty="0"/>
+              <a:t>: </a:t>
+            </a:r>
+            <a:r>
+              <a:rPr lang="es-MX" dirty="0" err="1"/>
+              <a:t>idx</a:t>
+            </a:r>
+            <a:r>
+              <a:rPr lang="es-MX" dirty="0"/>
+              <a:t> = </a:t>
+            </a:r>
+            <a:r>
+              <a:rPr lang="es-MX" dirty="0" err="1"/>
+              <a:t>acc</a:t>
+            </a:r>
+            <a:r>
+              <a:rPr lang="es-MX" dirty="0"/>
+              <a:t>&gt;&gt;19 + tabla[</a:t>
+            </a:r>
+            <a:r>
+              <a:rPr lang="es-MX" dirty="0" err="1"/>
+              <a:t>idx</a:t>
+            </a:r>
+            <a:r>
+              <a:rPr lang="es-MX" dirty="0"/>
+              <a:t>] -&gt;  Toma la fase y la convierte en el valor de la senoidal (mirando la tabla).</a:t>
             </a:r>
             <a:br>
-              <a:rPr lang="es-AR" dirty="0"/>
-            </a:br>
-            <a:r>
-              <a:rPr lang="es-AR" dirty="0"/>
-              <a:t>-  Por ultimo se vuelve a sumar 2048 ya que no tenemos tenciones negativas y vamos desde 0 a 3,3V</a:t>
-            </a:r>
-            <a:br>
-              <a:rPr lang="es-AR" dirty="0"/>
-            </a:br>
-            <a:r>
-              <a:rPr lang="es-AR" dirty="0"/>
-              <a:t>- El paso es de 0.2V, por lo que si tenemos la señal centrada en 1.6V, se tiene 1.6v para arriba y 1.6 para abajo, por lo que podemos cambiar la amplitud en 8 escalas. 1.6/0.2</a:t>
-            </a:r>
-            <a:br>
-              <a:rPr lang="es-AR" dirty="0"/>
+              <a:rPr lang="es-MX" dirty="0"/>
             </a:br>
             <a:br>
-              <a:rPr lang="es-AR" dirty="0"/>
+              <a:rPr lang="es-MX" dirty="0"/>
             </a:br>
             <a:r>
+              <a:rPr lang="es-MX" dirty="0" err="1"/>
+              <a:t>Fs</a:t>
+            </a:r>
+            <a:r>
               <a:rPr lang="es-MX" dirty="0"/>
-              <a:t>Mal: multiplicar directo (sin restar)</a:t>
+              <a:t>/N -&gt; 48k/2^13 = 5.86 </a:t>
+            </a:r>
+            <a:r>
+              <a:rPr lang="es-MX" dirty="0" err="1"/>
+              <a:t>hz</a:t>
             </a:r>
             <a:br>
-              <a:rPr lang="es-AR" dirty="0"/>
+              <a:rPr lang="es-MX" dirty="0"/>
+            </a:br>
+            <a:r>
+              <a:rPr lang="es-MX" dirty="0" err="1"/>
+              <a:t>Fs</a:t>
+            </a:r>
+            <a:r>
+              <a:rPr lang="es-MX" dirty="0"/>
+              <a:t>/2^32 -&gt; 48k/2^32 = 0.00001hz </a:t>
+            </a:r>
+            <a:br>
+              <a:rPr lang="es-MX" dirty="0"/>
+            </a:br>
+            <a:r>
+              <a:rPr lang="es-MX" dirty="0"/>
+              <a:t>al final es la misma cuenta porque luego en el índice </a:t>
+            </a:r>
+            <a:r>
+              <a:rPr lang="es-MX" dirty="0" err="1"/>
+              <a:t>idx</a:t>
+            </a:r>
+            <a:r>
+              <a:rPr lang="es-MX" dirty="0"/>
+              <a:t> = </a:t>
+            </a:r>
+            <a:r>
+              <a:rPr lang="es-MX" dirty="0" err="1"/>
+              <a:t>acc</a:t>
+            </a:r>
+            <a:r>
+              <a:rPr lang="es-MX" dirty="0"/>
+              <a:t> &gt;&gt; 19 se toman los 13 bits mas altos y se ignoran los 19 bits mas bajos.</a:t>
+            </a:r>
+            <a:br>
+              <a:rPr lang="es-MX" dirty="0"/>
             </a:br>
             <a:br>
-              <a:rPr lang="es-AR" dirty="0"/>
-            </a:br>
-            <a:r>
-              <a:rPr lang="es-AR" dirty="0"/>
-              <a:t>│ Punto  │ Cuenta │ ×0.5 │             Qué pasó             </a:t>
-            </a:r>
-          </a:p>
-          <a:p>
-            <a:r>
-              <a:rPr lang="es-AR" dirty="0"/>
-              <a:t>│ Cresta  │ 4095   │ 2048 │ bajó un montón                   </a:t>
-            </a:r>
-          </a:p>
-          <a:p>
-            <a:r>
-              <a:rPr lang="es-AR" dirty="0"/>
-              <a:t>│ Centro │ 2048   │ 1024 │ ¡el centro se corrió para abajo! </a:t>
-            </a:r>
-          </a:p>
-          <a:p>
-            <a:r>
-              <a:rPr lang="es-AR" dirty="0"/>
-              <a:t> |     Valle  │ 0          │ 0    │ no se movió nada</a:t>
-            </a:r>
-            <a:br>
-              <a:rPr lang="es-AR" dirty="0"/>
+              <a:rPr lang="es-MX" dirty="0"/>
             </a:br>
             <a:br>
-              <a:rPr lang="es-AR" dirty="0"/>
+              <a:rPr lang="es-MX" dirty="0"/>
             </a:br>
             <a:r>
               <a:rPr lang="es-MX" dirty="0"/>
-              <a:t>Bien: restar 2048 primero, después multiplicar</a:t>
-            </a:r>
-          </a:p>
-          <a:p>
+              <a:t>La tabla tiene UN ciclo completo de la senoidal, y el DAC saca una muestra cada tiempo fijo (1/</a:t>
+            </a:r>
+            <a:r>
+              <a:rPr lang="es-MX" dirty="0" err="1"/>
+              <a:t>fs</a:t>
+            </a:r>
             <a:r>
               <a:rPr lang="es-MX" dirty="0"/>
-              <a:t>│ Punto    | (tabla−2048) │ ×0.5    │ +2048 = salida │    Qué pasó     │</a:t>
-            </a:r>
-          </a:p>
-          <a:p>
+              <a:t>). La frecuencia de salida es cuántos ciclos </a:t>
+            </a:r>
+            <a:r>
+              <a:rPr lang="es-MX" dirty="0" err="1"/>
+              <a:t>completás</a:t>
+            </a:r>
             <a:r>
               <a:rPr lang="es-MX" dirty="0"/>
-              <a:t>│ Cresta  │ +2047          │ +1023 │ 3071                 │ bajó            │</a:t>
-            </a:r>
-          </a:p>
-          <a:p>
+              <a:t> por segundo, o sea qué tan rápido </a:t>
+            </a:r>
+            <a:r>
+              <a:rPr lang="es-MX" dirty="0" err="1"/>
+              <a:t>recorrés</a:t>
+            </a:r>
             <a:r>
               <a:rPr lang="es-MX" dirty="0"/>
-              <a:t>│ Centro │ 0                   │ 0         │ 2048                 │ quedó quieto ✔️ │</a:t>
-            </a:r>
-          </a:p>
-          <a:p>
+              <a:t> la tabla. Si el paso es más grande, </a:t>
+            </a:r>
+            <a:r>
+              <a:rPr lang="es-MX" dirty="0" err="1"/>
+              <a:t>terminás</a:t>
+            </a:r>
             <a:r>
               <a:rPr lang="es-MX" dirty="0"/>
-              <a:t>│ Valle    │ −2048           │ −1024  | 1024                  │ subió           │</a:t>
-            </a:r>
-          </a:p>
-          <a:p>
-            <a:endParaRPr lang="es-MX" dirty="0"/>
-          </a:p>
-          <a:p>
-            <a:endParaRPr lang="es-MX" dirty="0"/>
-          </a:p>
-          <a:p>
-            <a:r>
+              <a:t> la tabla (un ciclo) en menos muestras → cada ciclo dura menos → más frecuencia.</a:t>
+            </a:r>
+            <a:br>
               <a:rPr lang="es-MX" dirty="0"/>
-              <a:t>Ahora el "cero" es el centro (2048), porque al restar 2048 hiciste que el centro valga 0. Entonces la onda se encoge hacia el centro: la cresta baja y el valle sube, simétrico. Amplitud a la mitad, centrada.</a:t>
+            </a:br>
+            <a:br>
+              <a:rPr lang="es-MX" dirty="0"/>
+            </a:br>
+            <a:r>
+              <a:rPr lang="es-MX" dirty="0"/>
+              <a:t>El razonamiento con números</a:t>
+            </a:r>
+            <a:br>
+              <a:rPr lang="es-MX" dirty="0"/>
+            </a:br>
+            <a:br>
+              <a:rPr lang="es-MX" dirty="0"/>
+            </a:br>
+            <a:r>
+              <a:rPr lang="es-MX" dirty="0"/>
+              <a:t>Dos cosas fijas: la tabla tiene N = 8192 puntos (un ciclo) y el DAC tira muestras a </a:t>
+            </a:r>
+            <a:r>
+              <a:rPr lang="es-MX" dirty="0" err="1"/>
+              <a:t>fs</a:t>
+            </a:r>
+            <a:r>
+              <a:rPr lang="es-MX" dirty="0"/>
+              <a:t> = 48 kHz (ritmo constante, no cambia nunca).</a:t>
+            </a:r>
+            <a:br>
+              <a:rPr lang="es-MX" dirty="0"/>
+            </a:br>
+            <a:br>
+              <a:rPr lang="es-MX" dirty="0"/>
+            </a:br>
+            <a:r>
+              <a:rPr lang="es-MX" dirty="0"/>
+              <a:t>Un período de la señal = el tiempo que </a:t>
+            </a:r>
+            <a:r>
+              <a:rPr lang="es-MX" dirty="0" err="1"/>
+              <a:t>tardás</a:t>
+            </a:r>
+            <a:r>
+              <a:rPr lang="es-MX" dirty="0"/>
+              <a:t> en recorrer los 8192 puntos:</a:t>
+            </a:r>
+            <a:br>
+              <a:rPr lang="es-MX" dirty="0"/>
+            </a:br>
+            <a:br>
+              <a:rPr lang="es-MX" dirty="0"/>
+            </a:br>
+            <a:r>
+              <a:rPr lang="es-MX" dirty="0"/>
+              <a:t>muestras por ciclo = N / paso</a:t>
+            </a:r>
+            <a:br>
+              <a:rPr lang="es-MX" dirty="0"/>
+            </a:br>
+            <a:br>
+              <a:rPr lang="es-MX" dirty="0"/>
+            </a:br>
+            <a:r>
+              <a:rPr lang="es-MX" dirty="0"/>
+              <a:t>período           = (N / paso) / </a:t>
+            </a:r>
+            <a:r>
+              <a:rPr lang="es-MX" dirty="0" err="1"/>
+              <a:t>fs</a:t>
+            </a:r>
+            <a:r>
+              <a:rPr lang="es-MX" dirty="0"/>
+              <a:t>   [segundos]</a:t>
+            </a:r>
+            <a:br>
+              <a:rPr lang="es-MX" dirty="0"/>
+            </a:br>
+            <a:br>
+              <a:rPr lang="es-MX" dirty="0"/>
+            </a:br>
+            <a:r>
+              <a:rPr lang="es-MX" dirty="0"/>
+              <a:t>frecuencia        = 1 / período = paso · </a:t>
+            </a:r>
+            <a:r>
+              <a:rPr lang="es-MX" dirty="0" err="1"/>
+              <a:t>fs</a:t>
+            </a:r>
+            <a:r>
+              <a:rPr lang="es-MX" dirty="0"/>
+              <a:t> / N</a:t>
+            </a:r>
+            <a:br>
+              <a:rPr lang="es-MX" dirty="0"/>
+            </a:br>
+            <a:br>
+              <a:rPr lang="es-MX" dirty="0"/>
+            </a:br>
+            <a:r>
+              <a:rPr lang="es-MX" dirty="0"/>
+              <a:t>Entonces:</a:t>
+            </a:r>
+            <a:br>
+              <a:rPr lang="es-MX" dirty="0"/>
+            </a:br>
+            <a:br>
+              <a:rPr lang="es-MX" dirty="0"/>
+            </a:br>
+            <a:r>
+              <a:rPr lang="es-MX" dirty="0" err="1"/>
+              <a:t>fout</a:t>
+            </a:r>
+            <a:r>
+              <a:rPr lang="es-MX" dirty="0"/>
+              <a:t> = paso · </a:t>
+            </a:r>
+            <a:r>
+              <a:rPr lang="es-MX" dirty="0" err="1"/>
+              <a:t>fs</a:t>
+            </a:r>
+            <a:r>
+              <a:rPr lang="es-MX" dirty="0"/>
+              <a:t> / N</a:t>
+            </a:r>
+            <a:br>
+              <a:rPr lang="es-MX" dirty="0"/>
+            </a:br>
+            <a:br>
+              <a:rPr lang="es-MX" dirty="0"/>
+            </a:br>
+            <a:r>
+              <a:rPr lang="es-MX" dirty="0"/>
+              <a:t>La frecuencia es directamente proporcional al paso. Doble paso → doble frecuencia. Eso es lo que </a:t>
+            </a:r>
+            <a:r>
+              <a:rPr lang="es-MX" dirty="0" err="1"/>
+              <a:t>cambiás</a:t>
+            </a:r>
+            <a:r>
+              <a:rPr lang="es-MX" dirty="0"/>
+              <a:t> cuando </a:t>
+            </a:r>
+            <a:r>
+              <a:rPr lang="es-MX" dirty="0" err="1"/>
+              <a:t>mandás</a:t>
+            </a:r>
+            <a:r>
+              <a:rPr lang="es-MX" dirty="0"/>
+              <a:t> un número por la terminal</a:t>
             </a:r>
             <a:endParaRPr lang="es-AR" dirty="0"/>
           </a:p>
@@ -1132,7 +995,7 @@
           <a:p>
             <a:fld id="{7AA72860-7798-4D93-A7EE-515E361AE3C6}" type="slidenum">
               <a:rPr lang="es-AR" smtClean="0"/>
-              <a:t>7</a:t>
+              <a:t>6</a:t>
             </a:fld>
             <a:endParaRPr lang="es-AR"/>
           </a:p>
@@ -1141,7 +1004,7 @@
     </p:spTree>
     <p:extLst>
       <p:ext uri="{BB962C8B-B14F-4D97-AF65-F5344CB8AC3E}">
-        <p14:creationId xmlns:p14="http://schemas.microsoft.com/office/powerpoint/2010/main" val="1410744172"/>
+        <p14:creationId xmlns:p14="http://schemas.microsoft.com/office/powerpoint/2010/main" val="156473846"/>
       </p:ext>
     </p:extLst>
   </p:cSld>
@@ -1196,6 +1059,222 @@
           <a:lstStyle/>
           <a:p>
             <a:r>
+              <a:rPr lang="es-AR" dirty="0"/>
+              <a:t>Escalado: </a:t>
+            </a:r>
+            <a:br>
+              <a:rPr lang="es-AR" dirty="0"/>
+            </a:br>
+            <a:r>
+              <a:rPr lang="es-AR" dirty="0"/>
+              <a:t>- Se resta 2048 para centrar la altura en 0, ahora va de -2048 a +2047.</a:t>
+            </a:r>
+            <a:br>
+              <a:rPr lang="es-AR" dirty="0"/>
+            </a:br>
+            <a:r>
+              <a:rPr lang="es-AR" dirty="0"/>
+              <a:t>- Se multiplica por la ganancia </a:t>
+            </a:r>
+            <a:r>
+              <a:rPr lang="es-AR" dirty="0" err="1"/>
+              <a:t>amp</a:t>
+            </a:r>
+            <a:r>
+              <a:rPr lang="es-AR" dirty="0"/>
+              <a:t>/2048, si </a:t>
+            </a:r>
+            <a:r>
+              <a:rPr lang="es-AR" dirty="0" err="1"/>
+              <a:t>amp</a:t>
+            </a:r>
+            <a:r>
+              <a:rPr lang="es-AR" dirty="0"/>
+              <a:t> vale 20448 gana 1, si vale 1024 0,5 y si vale 0 salida nula.</a:t>
+            </a:r>
+            <a:br>
+              <a:rPr lang="es-AR" dirty="0"/>
+            </a:br>
+            <a:r>
+              <a:rPr lang="es-AR" dirty="0"/>
+              <a:t>-  Por ultimo se vuelve a sumar 2048 ya que no tenemos tenciones negativas y vamos desde 0 a 3,3V</a:t>
+            </a:r>
+            <a:br>
+              <a:rPr lang="es-AR" dirty="0"/>
+            </a:br>
+            <a:r>
+              <a:rPr lang="es-AR" dirty="0"/>
+              <a:t>- El paso es de 0.2V, por lo que si tenemos la señal centrada en 1.6V, se tiene 1.6v para arriba y 1.6 para abajo, por lo que podemos cambiar la amplitud en 8 escalas. 1.6/0.2</a:t>
+            </a:r>
+            <a:br>
+              <a:rPr lang="es-AR" dirty="0"/>
+            </a:br>
+            <a:br>
+              <a:rPr lang="es-AR" dirty="0"/>
+            </a:br>
+            <a:r>
+              <a:rPr lang="es-MX" dirty="0"/>
+              <a:t>Mal: multiplicar directo (sin restar)</a:t>
+            </a:r>
+            <a:br>
+              <a:rPr lang="es-AR" dirty="0"/>
+            </a:br>
+            <a:br>
+              <a:rPr lang="es-AR" dirty="0"/>
+            </a:br>
+            <a:r>
+              <a:rPr lang="es-AR" dirty="0"/>
+              <a:t>│ Punto  │ Cuenta │ ×0.5 │             Qué pasó             </a:t>
+            </a:r>
+          </a:p>
+          <a:p>
+            <a:r>
+              <a:rPr lang="es-AR" dirty="0"/>
+              <a:t>│ Cresta  │ 4095   │ 2048 │ bajó un montón                   </a:t>
+            </a:r>
+          </a:p>
+          <a:p>
+            <a:r>
+              <a:rPr lang="es-AR" dirty="0"/>
+              <a:t>│ Centro │ 2048   │ 1024 │ ¡el centro se corrió para abajo! </a:t>
+            </a:r>
+          </a:p>
+          <a:p>
+            <a:r>
+              <a:rPr lang="es-AR" dirty="0"/>
+              <a:t> |     Valle  │ 0          │ 0    │ no se movió nada</a:t>
+            </a:r>
+            <a:br>
+              <a:rPr lang="es-AR" dirty="0"/>
+            </a:br>
+            <a:br>
+              <a:rPr lang="es-AR" dirty="0"/>
+            </a:br>
+            <a:r>
+              <a:rPr lang="es-MX" dirty="0"/>
+              <a:t>Bien: restar 2048 primero, después multiplicar</a:t>
+            </a:r>
+          </a:p>
+          <a:p>
+            <a:r>
+              <a:rPr lang="es-MX" dirty="0"/>
+              <a:t>│ Punto    | (tabla−2048) │ ×0.5    │ +2048 = salida │    Qué pasó     │</a:t>
+            </a:r>
+          </a:p>
+          <a:p>
+            <a:r>
+              <a:rPr lang="es-MX" dirty="0"/>
+              <a:t>│ Cresta  │ +2047          │ +1023 │ 3071                 │ bajó            │</a:t>
+            </a:r>
+          </a:p>
+          <a:p>
+            <a:r>
+              <a:rPr lang="es-MX" dirty="0"/>
+              <a:t>│ Centro │ 0                   │ 0         │ 2048                 │ quedó quieto ✔️ │</a:t>
+            </a:r>
+          </a:p>
+          <a:p>
+            <a:r>
+              <a:rPr lang="es-MX" dirty="0"/>
+              <a:t>│ Valle    │ −2048           │ −1024  | 1024                  │ subió           │</a:t>
+            </a:r>
+          </a:p>
+          <a:p>
+            <a:endParaRPr lang="es-MX" dirty="0"/>
+          </a:p>
+          <a:p>
+            <a:endParaRPr lang="es-MX" dirty="0"/>
+          </a:p>
+          <a:p>
+            <a:r>
+              <a:rPr lang="es-MX" dirty="0"/>
+              <a:t>Ahora el "cero" es el centro (2048), porque al restar 2048 hiciste que el centro valga 0. Entonces la onda se encoge hacia el centro: la cresta baja y el valle sube, simétrico. Amplitud a la mitad, centrada.</a:t>
+            </a:r>
+            <a:endParaRPr lang="es-AR" dirty="0"/>
+          </a:p>
+        </p:txBody>
+      </p:sp>
+      <p:sp>
+        <p:nvSpPr>
+          <p:cNvPr id="4" name="Marcador de número de diapositiva 3"/>
+          <p:cNvSpPr>
+            <a:spLocks noGrp="1"/>
+          </p:cNvSpPr>
+          <p:nvPr>
+            <p:ph type="sldNum" sz="quarter" idx="5"/>
+          </p:nvPr>
+        </p:nvSpPr>
+        <p:spPr/>
+        <p:txBody>
+          <a:bodyPr/>
+          <a:lstStyle/>
+          <a:p>
+            <a:fld id="{7AA72860-7798-4D93-A7EE-515E361AE3C6}" type="slidenum">
+              <a:rPr lang="es-AR" smtClean="0"/>
+              <a:t>7</a:t>
+            </a:fld>
+            <a:endParaRPr lang="es-AR"/>
+          </a:p>
+        </p:txBody>
+      </p:sp>
+    </p:spTree>
+    <p:extLst>
+      <p:ext uri="{BB962C8B-B14F-4D97-AF65-F5344CB8AC3E}">
+        <p14:creationId xmlns:p14="http://schemas.microsoft.com/office/powerpoint/2010/main" val="1410744172"/>
+      </p:ext>
+    </p:extLst>
+  </p:cSld>
+  <p:clrMapOvr>
+    <a:masterClrMapping/>
+  </p:clrMapOvr>
+</p:notes>
+</file>
+
+<file path=ppt/notesSlides/notesSlide4.xml><?xml version="1.0" encoding="utf-8"?>
+<p:notes xmlns:a="http://schemas.openxmlformats.org/drawingml/2006/main" xmlns:r="http://schemas.openxmlformats.org/officeDocument/2006/relationships" xmlns:p="http://schemas.openxmlformats.org/presentationml/2006/main">
+  <p:cSld>
+    <p:spTree>
+      <p:nvGrpSpPr>
+        <p:cNvPr id="1" name=""/>
+        <p:cNvGrpSpPr/>
+        <p:nvPr/>
+      </p:nvGrpSpPr>
+      <p:grpSpPr>
+        <a:xfrm>
+          <a:off x="0" y="0"/>
+          <a:ext cx="0" cy="0"/>
+          <a:chOff x="0" y="0"/>
+          <a:chExt cx="0" cy="0"/>
+        </a:xfrm>
+      </p:grpSpPr>
+      <p:sp>
+        <p:nvSpPr>
+          <p:cNvPr id="2" name="Marcador de imagen de diapositiva 1"/>
+          <p:cNvSpPr>
+            <a:spLocks noGrp="1" noRot="1" noChangeAspect="1"/>
+          </p:cNvSpPr>
+          <p:nvPr>
+            <p:ph type="sldImg"/>
+          </p:nvPr>
+        </p:nvSpPr>
+        <p:spPr/>
+      </p:sp>
+      <p:sp>
+        <p:nvSpPr>
+          <p:cNvPr id="3" name="Marcador de notas 2"/>
+          <p:cNvSpPr>
+            <a:spLocks noGrp="1"/>
+          </p:cNvSpPr>
+          <p:nvPr>
+            <p:ph type="body" idx="1"/>
+          </p:nvPr>
+        </p:nvSpPr>
+        <p:spPr/>
+        <p:txBody>
+          <a:bodyPr/>
+          <a:lstStyle/>
+          <a:p>
+            <a:r>
               <a:rPr lang="es-MX" dirty="0"/>
               <a:t>El DAC es de 12 bits → 4096 niveles (0 a 4095), repartidos en el rango de 0 a 3.3 V. Entonces cada cuenta (cada "escalón" del DAC) vale:</a:t>
             </a:r>
@@ -1304,7 +1383,7 @@
 </p:notes>
 </file>
 
-<file path=ppt/notesSlides/notesSlide4.xml><?xml version="1.0" encoding="utf-8"?>
+<file path=ppt/notesSlides/notesSlide5.xml><?xml version="1.0" encoding="utf-8"?>
 <p:notes xmlns:a="http://schemas.openxmlformats.org/drawingml/2006/main" xmlns:r="http://schemas.openxmlformats.org/officeDocument/2006/relationships" xmlns:p="http://schemas.openxmlformats.org/presentationml/2006/main">
   <p:cSld>
     <p:spTree>
@@ -1567,7 +1646,7 @@
           <a:p>
             <a:fld id="{5BCAD085-E8A6-8845-BD4E-CB4CCA059FC4}" type="datetimeFigureOut">
               <a:rPr lang="en-US" smtClean="0"/>
-              <a:t>9/8/2026</a:t>
+              <a:t>9/9/2026</a:t>
             </a:fld>
             <a:endParaRPr lang="en-US"/>
           </a:p>
@@ -1735,7 +1814,7 @@
           <a:p>
             <a:fld id="{5BCAD085-E8A6-8845-BD4E-CB4CCA059FC4}" type="datetimeFigureOut">
               <a:rPr lang="en-US" smtClean="0"/>
-              <a:t>9/8/2026</a:t>
+              <a:t>9/9/2026</a:t>
             </a:fld>
             <a:endParaRPr lang="en-US"/>
           </a:p>
@@ -1913,7 +1992,7 @@
           <a:p>
             <a:fld id="{5BCAD085-E8A6-8845-BD4E-CB4CCA059FC4}" type="datetimeFigureOut">
               <a:rPr lang="en-US" smtClean="0"/>
-              <a:t>9/8/2026</a:t>
+              <a:t>9/9/2026</a:t>
             </a:fld>
             <a:endParaRPr lang="en-US"/>
           </a:p>
@@ -2081,7 +2160,7 @@
           <a:p>
             <a:fld id="{5BCAD085-E8A6-8845-BD4E-CB4CCA059FC4}" type="datetimeFigureOut">
               <a:rPr lang="en-US" smtClean="0"/>
-              <a:t>9/8/2026</a:t>
+              <a:t>9/9/2026</a:t>
             </a:fld>
             <a:endParaRPr lang="en-US"/>
           </a:p>
@@ -2326,7 +2405,7 @@
           <a:p>
             <a:fld id="{5BCAD085-E8A6-8845-BD4E-CB4CCA059FC4}" type="datetimeFigureOut">
               <a:rPr lang="en-US" smtClean="0"/>
-              <a:t>9/8/2026</a:t>
+              <a:t>9/9/2026</a:t>
             </a:fld>
             <a:endParaRPr lang="en-US"/>
           </a:p>
@@ -2611,7 +2690,7 @@
           <a:p>
             <a:fld id="{5BCAD085-E8A6-8845-BD4E-CB4CCA059FC4}" type="datetimeFigureOut">
               <a:rPr lang="en-US" smtClean="0"/>
-              <a:t>9/8/2026</a:t>
+              <a:t>9/9/2026</a:t>
             </a:fld>
             <a:endParaRPr lang="en-US"/>
           </a:p>
@@ -3030,7 +3109,7 @@
           <a:p>
             <a:fld id="{5BCAD085-E8A6-8845-BD4E-CB4CCA059FC4}" type="datetimeFigureOut">
               <a:rPr lang="en-US" smtClean="0"/>
-              <a:t>9/8/2026</a:t>
+              <a:t>9/9/2026</a:t>
             </a:fld>
             <a:endParaRPr lang="en-US"/>
           </a:p>
@@ -3147,7 +3226,7 @@
           <a:p>
             <a:fld id="{5BCAD085-E8A6-8845-BD4E-CB4CCA059FC4}" type="datetimeFigureOut">
               <a:rPr lang="en-US" smtClean="0"/>
-              <a:t>9/8/2026</a:t>
+              <a:t>9/9/2026</a:t>
             </a:fld>
             <a:endParaRPr lang="en-US"/>
           </a:p>
@@ -3242,7 +3321,7 @@
           <a:p>
             <a:fld id="{5BCAD085-E8A6-8845-BD4E-CB4CCA059FC4}" type="datetimeFigureOut">
               <a:rPr lang="en-US" smtClean="0"/>
-              <a:t>9/8/2026</a:t>
+              <a:t>9/9/2026</a:t>
             </a:fld>
             <a:endParaRPr lang="en-US"/>
           </a:p>
@@ -3517,7 +3596,7 @@
           <a:p>
             <a:fld id="{5BCAD085-E8A6-8845-BD4E-CB4CCA059FC4}" type="datetimeFigureOut">
               <a:rPr lang="en-US" smtClean="0"/>
-              <a:t>9/8/2026</a:t>
+              <a:t>9/9/2026</a:t>
             </a:fld>
             <a:endParaRPr lang="en-US"/>
           </a:p>
@@ -3769,7 +3848,7 @@
           <a:p>
             <a:fld id="{5BCAD085-E8A6-8845-BD4E-CB4CCA059FC4}" type="datetimeFigureOut">
               <a:rPr lang="en-US" smtClean="0"/>
-              <a:t>9/8/2026</a:t>
+              <a:t>9/9/2026</a:t>
             </a:fld>
             <a:endParaRPr lang="en-US"/>
           </a:p>
@@ -3980,7 +4059,7 @@
           <a:p>
             <a:fld id="{5BCAD085-E8A6-8845-BD4E-CB4CCA059FC4}" type="datetimeFigureOut">
               <a:rPr lang="en-US" smtClean="0"/>
-              <a:t>9/8/2026</a:t>
+              <a:t>9/9/2026</a:t>
             </a:fld>
             <a:endParaRPr lang="en-US"/>
           </a:p>
@@ -5629,7 +5708,7 @@
         <p:spPr>
           <a:xfrm>
             <a:off x="704088" y="1911095"/>
-            <a:ext cx="8412480" cy="3355848"/>
+            <a:ext cx="6456896" cy="2705677"/>
           </a:xfrm>
           <a:prstGeom prst="rect">
             <a:avLst/>
@@ -5651,13 +5730,49 @@
               </a:spcAft>
             </a:pPr>
             <a:r>
-              <a:rPr sz="1200" i="1">
+              <a:rPr sz="1200" i="1" dirty="0">
                 <a:solidFill>
                   <a:srgbClr val="6EB58F"/>
                 </a:solidFill>
                 <a:latin typeface="Consolas"/>
               </a:rPr>
-              <a:t>/* Variables — una por canal (arrays de 2) */</a:t>
+              <a:t>/* Variables — </a:t>
+            </a:r>
+            <a:r>
+              <a:rPr sz="1200" i="1" dirty="0" err="1">
+                <a:solidFill>
+                  <a:srgbClr val="6EB58F"/>
+                </a:solidFill>
+                <a:latin typeface="Consolas"/>
+              </a:rPr>
+              <a:t>una</a:t>
+            </a:r>
+            <a:r>
+              <a:rPr sz="1200" i="1" dirty="0">
+                <a:solidFill>
+                  <a:srgbClr val="6EB58F"/>
+                </a:solidFill>
+                <a:latin typeface="Consolas"/>
+              </a:rPr>
+              <a:t> </a:t>
+            </a:r>
+            <a:r>
+              <a:rPr sz="1200" i="1" dirty="0" err="1">
+                <a:solidFill>
+                  <a:srgbClr val="6EB58F"/>
+                </a:solidFill>
+                <a:latin typeface="Consolas"/>
+              </a:rPr>
+              <a:t>por</a:t>
+            </a:r>
+            <a:r>
+              <a:rPr sz="1200" i="1" dirty="0">
+                <a:solidFill>
+                  <a:srgbClr val="6EB58F"/>
+                </a:solidFill>
+                <a:latin typeface="Consolas"/>
+              </a:rPr>
+              <a:t> canal (arrays de 2) */</a:t>
             </a:r>
           </a:p>
           <a:p>
@@ -5670,7 +5785,7 @@
               </a:spcAft>
             </a:pPr>
             <a:r>
-              <a:rPr sz="1200">
+              <a:rPr sz="1200" dirty="0">
                 <a:solidFill>
                   <a:srgbClr val="DFE9F2"/>
                 </a:solidFill>
@@ -5679,14 +5794,47 @@
               <a:t>uint32_t          acc[2]       = {0, 0};      </a:t>
             </a:r>
             <a:r>
-              <a:rPr sz="1200" i="1">
+              <a:rPr sz="1200" i="1" dirty="0">
                 <a:solidFill>
                   <a:srgbClr val="6EB58F"/>
                 </a:solidFill>
                 <a:latin typeface="Consolas"/>
               </a:rPr>
-              <a:t>// acumulador de fase</a:t>
-            </a:r>
+              <a:t>// </a:t>
+            </a:r>
+            <a:r>
+              <a:rPr sz="1200" i="1" dirty="0" err="1">
+                <a:solidFill>
+                  <a:srgbClr val="6EB58F"/>
+                </a:solidFill>
+                <a:latin typeface="Consolas"/>
+              </a:rPr>
+              <a:t>acumulador</a:t>
+            </a:r>
+            <a:r>
+              <a:rPr sz="1200" i="1" dirty="0">
+                <a:solidFill>
+                  <a:srgbClr val="6EB58F"/>
+                </a:solidFill>
+                <a:latin typeface="Consolas"/>
+              </a:rPr>
+              <a:t> de </a:t>
+            </a:r>
+            <a:r>
+              <a:rPr sz="1200" i="1" dirty="0" err="1">
+                <a:solidFill>
+                  <a:srgbClr val="6EB58F"/>
+                </a:solidFill>
+                <a:latin typeface="Consolas"/>
+              </a:rPr>
+              <a:t>fase</a:t>
+            </a:r>
+            <a:endParaRPr sz="1200" i="1" dirty="0">
+              <a:solidFill>
+                <a:srgbClr val="6EB58F"/>
+              </a:solidFill>
+              <a:latin typeface="Consolas"/>
+            </a:endParaRPr>
           </a:p>
           <a:p>
             <a:pPr algn="l">
@@ -5698,22 +5846,58 @@
               </a:spcAft>
             </a:pPr>
             <a:r>
-              <a:rPr sz="1200">
+              <a:rPr sz="1200" dirty="0">
                 <a:solidFill>
                   <a:srgbClr val="DFE9F2"/>
                 </a:solidFill>
                 <a:latin typeface="Consolas"/>
               </a:rPr>
-              <a:t>volatile uint32_t ftw[2]       = {0, 0};      </a:t>
-            </a:r>
-            <a:r>
-              <a:rPr sz="1200" i="1">
+              <a:t>volatile uint32_t </a:t>
+            </a:r>
+            <a:r>
+              <a:rPr sz="1200" dirty="0" err="1">
+                <a:solidFill>
+                  <a:srgbClr val="DFE9F2"/>
+                </a:solidFill>
+                <a:latin typeface="Consolas"/>
+              </a:rPr>
+              <a:t>ftw</a:t>
+            </a:r>
+            <a:r>
+              <a:rPr sz="1200" dirty="0">
+                <a:solidFill>
+                  <a:srgbClr val="DFE9F2"/>
+                </a:solidFill>
+                <a:latin typeface="Consolas"/>
+              </a:rPr>
+              <a:t>[2]       = {0, 0};      </a:t>
+            </a:r>
+            <a:r>
+              <a:rPr sz="1200" i="1" dirty="0">
                 <a:solidFill>
                   <a:srgbClr val="6EB58F"/>
                 </a:solidFill>
                 <a:latin typeface="Consolas"/>
               </a:rPr>
-              <a:t>// paso (define la frecuencia)</a:t>
+              <a:t>// paso (define la </a:t>
+            </a:r>
+            <a:r>
+              <a:rPr sz="1200" i="1" dirty="0" err="1">
+                <a:solidFill>
+                  <a:srgbClr val="6EB58F"/>
+                </a:solidFill>
+                <a:latin typeface="Consolas"/>
+              </a:rPr>
+              <a:t>frecuencia</a:t>
+            </a:r>
+            <a:r>
+              <a:rPr sz="1200" i="1" dirty="0">
+                <a:solidFill>
+                  <a:srgbClr val="6EB58F"/>
+                </a:solidFill>
+                <a:latin typeface="Consolas"/>
+              </a:rPr>
+              <a:t>)</a:t>
             </a:r>
           </a:p>
           <a:p>
@@ -5726,16 +5910,34 @@
               </a:spcAft>
             </a:pPr>
             <a:r>
-              <a:rPr sz="1200">
+              <a:rPr sz="1200" dirty="0">
                 <a:solidFill>
                   <a:srgbClr val="DFE9F2"/>
                 </a:solidFill>
                 <a:latin typeface="Consolas"/>
               </a:rPr>
-              <a:t>volatile uint8_t  salida_on[2] = {1, 1};      </a:t>
-            </a:r>
-            <a:r>
-              <a:rPr sz="1200" i="1">
+              <a:t>volatile uint8_t  </a:t>
+            </a:r>
+            <a:r>
+              <a:rPr sz="1200" dirty="0" err="1">
+                <a:solidFill>
+                  <a:srgbClr val="DFE9F2"/>
+                </a:solidFill>
+                <a:latin typeface="Consolas"/>
+              </a:rPr>
+              <a:t>salida_on</a:t>
+            </a:r>
+            <a:r>
+              <a:rPr sz="1200" dirty="0">
+                <a:solidFill>
+                  <a:srgbClr val="DFE9F2"/>
+                </a:solidFill>
+                <a:latin typeface="Consolas"/>
+              </a:rPr>
+              <a:t>[2] = {1, 1};      </a:t>
+            </a:r>
+            <a:r>
+              <a:rPr sz="1200" i="1" dirty="0">
                 <a:solidFill>
                   <a:srgbClr val="6EB58F"/>
                 </a:solidFill>
@@ -5754,7 +5956,7 @@
               </a:spcAft>
             </a:pPr>
             <a:r>
-              <a:rPr sz="1200">
+              <a:rPr sz="1200" dirty="0">
                 <a:solidFill>
                   <a:srgbClr val="DFE9F2"/>
                 </a:solidFill>
@@ -5763,13 +5965,92 @@
               <a:t>volatile int32_t  amp[2]       = {2048,2048}; </a:t>
             </a:r>
             <a:r>
-              <a:rPr sz="1200" i="1">
+              <a:rPr sz="1200" i="1" dirty="0">
                 <a:solidFill>
                   <a:srgbClr val="6EB58F"/>
                 </a:solidFill>
                 <a:latin typeface="Consolas"/>
               </a:rPr>
-              <a:t>// amplitud (2048 = maxima)</a:t>
+              <a:t>// </a:t>
+            </a:r>
+            <a:r>
+              <a:rPr sz="1200" i="1" dirty="0" err="1">
+                <a:solidFill>
+                  <a:srgbClr val="6EB58F"/>
+                </a:solidFill>
+                <a:latin typeface="Consolas"/>
+              </a:rPr>
+              <a:t>amplitud</a:t>
+            </a:r>
+            <a:r>
+              <a:rPr sz="1200" i="1" dirty="0">
+                <a:solidFill>
+                  <a:srgbClr val="6EB58F"/>
+                </a:solidFill>
+                <a:latin typeface="Consolas"/>
+              </a:rPr>
+              <a:t> (2048 = maxima)</a:t>
+            </a:r>
+          </a:p>
+          <a:p>
+            <a:pPr>
+              <a:lnSpc>
+                <a:spcPct val="105000"/>
+              </a:lnSpc>
+            </a:pPr>
+            <a:r>
+              <a:rPr sz="1200" dirty="0">
+                <a:solidFill>
+                  <a:srgbClr val="DFE9F2"/>
+                </a:solidFill>
+                <a:latin typeface="Consolas"/>
+              </a:rPr>
+              <a:t>volatile uint8_t  canal        = </a:t>
+            </a:r>
+            <a:r>
+              <a:rPr lang="es-AR" sz="1200" dirty="0">
+                <a:solidFill>
+                  <a:srgbClr val="DFE9F2"/>
+                </a:solidFill>
+                <a:latin typeface="Consolas"/>
+              </a:rPr>
+              <a:t>CANAL_L</a:t>
+            </a:r>
+            <a:r>
+              <a:rPr sz="1200" dirty="0">
+                <a:solidFill>
+                  <a:srgbClr val="DFE9F2"/>
+                </a:solidFill>
+                <a:latin typeface="Consolas"/>
+              </a:rPr>
+              <a:t>;           </a:t>
+            </a:r>
+            <a:r>
+              <a:rPr sz="1200" i="1" dirty="0">
+                <a:solidFill>
+                  <a:srgbClr val="6EB58F"/>
+                </a:solidFill>
+                <a:latin typeface="Consolas"/>
+              </a:rPr>
+              <a:t>// canal </a:t>
+            </a:r>
+            <a:r>
+              <a:rPr sz="1200" i="1" dirty="0" err="1">
+                <a:solidFill>
+                  <a:srgbClr val="6EB58F"/>
+                </a:solidFill>
+                <a:latin typeface="Consolas"/>
+              </a:rPr>
+              <a:t>activo</a:t>
+            </a:r>
+            <a:r>
+              <a:rPr sz="1200" i="1" dirty="0">
+                <a:solidFill>
+                  <a:srgbClr val="6EB58F"/>
+                </a:solidFill>
+                <a:latin typeface="Consolas"/>
+              </a:rPr>
+              <a:t> (0 o 1)</a:t>
             </a:r>
           </a:p>
           <a:p>
@@ -5782,22 +6063,40 @@
               </a:spcAft>
             </a:pPr>
             <a:r>
-              <a:rPr sz="1200">
+              <a:rPr sz="1200" dirty="0">
                 <a:solidFill>
                   <a:srgbClr val="DFE9F2"/>
                 </a:solidFill>
                 <a:latin typeface="Consolas"/>
               </a:rPr>
-              <a:t>volatile uint8_t  canal        = 0;           </a:t>
-            </a:r>
-            <a:r>
-              <a:rPr sz="1200" i="1">
+              <a:t>#define AMP_STEP 248                           </a:t>
+            </a:r>
+            <a:r>
+              <a:rPr sz="1200" i="1" dirty="0">
                 <a:solidFill>
                   <a:srgbClr val="6EB58F"/>
                 </a:solidFill>
                 <a:latin typeface="Consolas"/>
               </a:rPr>
-              <a:t>// canal activo (0 o 1)</a:t>
+              <a:t>// paso de </a:t>
+            </a:r>
+            <a:r>
+              <a:rPr sz="1200" i="1" dirty="0" err="1">
+                <a:solidFill>
+                  <a:srgbClr val="6EB58F"/>
+                </a:solidFill>
+                <a:latin typeface="Consolas"/>
+              </a:rPr>
+              <a:t>amplitud</a:t>
+            </a:r>
+            <a:r>
+              <a:rPr sz="1200" i="1" dirty="0">
+                <a:solidFill>
+                  <a:srgbClr val="6EB58F"/>
+                </a:solidFill>
+                <a:latin typeface="Consolas"/>
+              </a:rPr>
+              <a:t> (~0.2 V)</a:t>
             </a:r>
           </a:p>
           <a:p>
@@ -5810,22 +6109,13 @@
               </a:spcAft>
             </a:pPr>
             <a:r>
-              <a:rPr sz="1200">
+              <a:rPr sz="1200" dirty="0">
                 <a:solidFill>
                   <a:srgbClr val="DFE9F2"/>
                 </a:solidFill>
                 <a:latin typeface="Consolas"/>
               </a:rPr>
-              <a:t>#define AMP_STEP 248                           </a:t>
-            </a:r>
-            <a:r>
-              <a:rPr sz="1200" i="1">
-                <a:solidFill>
-                  <a:srgbClr val="6EB58F"/>
-                </a:solidFill>
-                <a:latin typeface="Consolas"/>
-              </a:rPr>
-              <a:t>// paso de amplitud (~0.2 V)</a:t>
+              <a:t> </a:t>
             </a:r>
           </a:p>
           <a:p>
@@ -5838,13 +6128,49 @@
               </a:spcAft>
             </a:pPr>
             <a:r>
-              <a:rPr sz="1200">
-                <a:solidFill>
-                  <a:srgbClr val="DFE9F2"/>
+              <a:rPr sz="1200" i="1" dirty="0">
+                <a:solidFill>
+                  <a:srgbClr val="6EB58F"/>
                 </a:solidFill>
                 <a:latin typeface="Consolas"/>
               </a:rPr>
-              <a:t> </a:t>
+              <a:t>/* </a:t>
+            </a:r>
+            <a:r>
+              <a:rPr sz="1200" i="1" dirty="0" err="1">
+                <a:solidFill>
+                  <a:srgbClr val="6EB58F"/>
+                </a:solidFill>
+                <a:latin typeface="Consolas"/>
+              </a:rPr>
+              <a:t>Arranque</a:t>
+            </a:r>
+            <a:r>
+              <a:rPr sz="1200" i="1" dirty="0">
+                <a:solidFill>
+                  <a:srgbClr val="6EB58F"/>
+                </a:solidFill>
+                <a:latin typeface="Consolas"/>
+              </a:rPr>
+              <a:t> — </a:t>
+            </a:r>
+            <a:r>
+              <a:rPr sz="1200" i="1" dirty="0" err="1">
+                <a:solidFill>
+                  <a:srgbClr val="6EB58F"/>
+                </a:solidFill>
+                <a:latin typeface="Consolas"/>
+              </a:rPr>
+              <a:t>dentro</a:t>
+            </a:r>
+            <a:r>
+              <a:rPr sz="1200" i="1" dirty="0">
+                <a:solidFill>
+                  <a:srgbClr val="6EB58F"/>
+                </a:solidFill>
+                <a:latin typeface="Consolas"/>
+              </a:rPr>
+              <a:t> de main() */</a:t>
             </a:r>
           </a:p>
           <a:p>
@@ -5857,13 +6183,31 @@
               </a:spcAft>
             </a:pPr>
             <a:r>
-              <a:rPr sz="1200" i="1">
+              <a:rPr sz="1200" dirty="0" err="1">
+                <a:solidFill>
+                  <a:srgbClr val="DFE9F2"/>
+                </a:solidFill>
+                <a:latin typeface="Consolas"/>
+              </a:rPr>
+              <a:t>ftw</a:t>
+            </a:r>
+            <a:r>
+              <a:rPr sz="1200" dirty="0">
+                <a:solidFill>
+                  <a:srgbClr val="DFE9F2"/>
+                </a:solidFill>
+                <a:latin typeface="Consolas"/>
+              </a:rPr>
+              <a:t>[0] = (uint32_t)(500.0 * 4294967296.0 / 48000.0); </a:t>
+            </a:r>
+            <a:r>
+              <a:rPr sz="1200" i="1" dirty="0">
                 <a:solidFill>
                   <a:srgbClr val="6EB58F"/>
                 </a:solidFill>
                 <a:latin typeface="Consolas"/>
               </a:rPr>
-              <a:t>/* Arranque — dentro de main() */</a:t>
+              <a:t>// canal 1 -&gt; 500 Hz</a:t>
             </a:r>
           </a:p>
           <a:p>
@@ -5876,23 +6220,47 @@
               </a:spcAft>
             </a:pPr>
             <a:r>
-              <a:rPr sz="1200">
+              <a:rPr sz="1200" dirty="0" err="1">
                 <a:solidFill>
                   <a:srgbClr val="DFE9F2"/>
                 </a:solidFill>
                 <a:latin typeface="Consolas"/>
               </a:rPr>
-              <a:t>ftw[0] = (uint32_t)(500.0 * 4294967296.0 / 48000.0); </a:t>
-            </a:r>
-            <a:r>
-              <a:rPr sz="1200" i="1">
+              <a:t>ftw</a:t>
+            </a:r>
+            <a:r>
+              <a:rPr sz="1200" dirty="0">
+                <a:solidFill>
+                  <a:srgbClr val="DFE9F2"/>
+                </a:solidFill>
+                <a:latin typeface="Consolas"/>
+              </a:rPr>
+              <a:t>[1] = 0;                                   </a:t>
+            </a:r>
+            <a:r>
+              <a:rPr sz="1200" i="1" dirty="0">
                 <a:solidFill>
                   <a:srgbClr val="6EB58F"/>
                 </a:solidFill>
                 <a:latin typeface="Consolas"/>
               </a:rPr>
-              <a:t>// canal 1 -&gt; 500 Hz</a:t>
-            </a:r>
+              <a:t>// canal 2 -&gt; </a:t>
+            </a:r>
+            <a:r>
+              <a:rPr sz="1200" i="1" dirty="0" err="1">
+                <a:solidFill>
+                  <a:srgbClr val="6EB58F"/>
+                </a:solidFill>
+                <a:latin typeface="Consolas"/>
+              </a:rPr>
+              <a:t>apagado</a:t>
+            </a:r>
+            <a:endParaRPr sz="1200" i="1" dirty="0">
+              <a:solidFill>
+                <a:srgbClr val="6EB58F"/>
+              </a:solidFill>
+              <a:latin typeface="Consolas"/>
+            </a:endParaRPr>
           </a:p>
           <a:p>
             <a:pPr algn="l">
@@ -5904,22 +6272,40 @@
               </a:spcAft>
             </a:pPr>
             <a:r>
-              <a:rPr sz="1200">
+              <a:rPr sz="1200" dirty="0" err="1">
                 <a:solidFill>
                   <a:srgbClr val="DFE9F2"/>
                 </a:solidFill>
                 <a:latin typeface="Consolas"/>
               </a:rPr>
-              <a:t>ftw[1] = 0;                                   </a:t>
-            </a:r>
-            <a:r>
-              <a:rPr sz="1200" i="1">
-                <a:solidFill>
-                  <a:srgbClr val="6EB58F"/>
+              <a:t>HAL_DAC_Start</a:t>
+            </a:r>
+            <a:r>
+              <a:rPr sz="1200" dirty="0">
+                <a:solidFill>
+                  <a:srgbClr val="DFE9F2"/>
                 </a:solidFill>
                 <a:latin typeface="Consolas"/>
               </a:rPr>
-              <a:t>// canal 2 -&gt; apagado</a:t>
+              <a:t>(&amp;</a:t>
+            </a:r>
+            <a:r>
+              <a:rPr sz="1200" dirty="0" err="1">
+                <a:solidFill>
+                  <a:srgbClr val="DFE9F2"/>
+                </a:solidFill>
+                <a:latin typeface="Consolas"/>
+              </a:rPr>
+              <a:t>hdac</a:t>
+            </a:r>
+            <a:r>
+              <a:rPr sz="1200" dirty="0">
+                <a:solidFill>
+                  <a:srgbClr val="DFE9F2"/>
+                </a:solidFill>
+                <a:latin typeface="Consolas"/>
+              </a:rPr>
+              <a:t>, DAC_CHANNEL_1);</a:t>
             </a:r>
           </a:p>
           <a:p>
@@ -5932,13 +6318,85 @@
               </a:spcAft>
             </a:pPr>
             <a:r>
-              <a:rPr sz="1200">
+              <a:rPr sz="1200" dirty="0" err="1">
                 <a:solidFill>
                   <a:srgbClr val="DFE9F2"/>
                 </a:solidFill>
                 <a:latin typeface="Consolas"/>
               </a:rPr>
-              <a:t>HAL_DAC_Start(&amp;hdac, DAC_CHANNEL_1);</a:t>
+              <a:t>HAL_DAC_Start</a:t>
+            </a:r>
+            <a:r>
+              <a:rPr sz="1200" dirty="0">
+                <a:solidFill>
+                  <a:srgbClr val="DFE9F2"/>
+                </a:solidFill>
+                <a:latin typeface="Consolas"/>
+              </a:rPr>
+              <a:t>(&amp;</a:t>
+            </a:r>
+            <a:r>
+              <a:rPr sz="1200" dirty="0" err="1">
+                <a:solidFill>
+                  <a:srgbClr val="DFE9F2"/>
+                </a:solidFill>
+                <a:latin typeface="Consolas"/>
+              </a:rPr>
+              <a:t>hdac</a:t>
+            </a:r>
+            <a:r>
+              <a:rPr sz="1200" dirty="0">
+                <a:solidFill>
+                  <a:srgbClr val="DFE9F2"/>
+                </a:solidFill>
+                <a:latin typeface="Consolas"/>
+              </a:rPr>
+              <a:t>, DAC_CHANNEL_2);          </a:t>
+            </a:r>
+            <a:r>
+              <a:rPr sz="1200" i="1" dirty="0">
+                <a:solidFill>
+                  <a:srgbClr val="6EB58F"/>
+                </a:solidFill>
+                <a:latin typeface="Consolas"/>
+              </a:rPr>
+              <a:t>// </a:t>
+            </a:r>
+            <a:r>
+              <a:rPr sz="1200" i="1" dirty="0" err="1">
+                <a:solidFill>
+                  <a:srgbClr val="6EB58F"/>
+                </a:solidFill>
+                <a:latin typeface="Consolas"/>
+              </a:rPr>
+              <a:t>arranca</a:t>
+            </a:r>
+            <a:r>
+              <a:rPr sz="1200" i="1" dirty="0">
+                <a:solidFill>
+                  <a:srgbClr val="6EB58F"/>
+                </a:solidFill>
+                <a:latin typeface="Consolas"/>
+              </a:rPr>
+              <a:t> </a:t>
+            </a:r>
+            <a:r>
+              <a:rPr sz="1200" i="1" dirty="0" err="1">
+                <a:solidFill>
+                  <a:srgbClr val="6EB58F"/>
+                </a:solidFill>
+                <a:latin typeface="Consolas"/>
+              </a:rPr>
+              <a:t>los</a:t>
+            </a:r>
+            <a:r>
+              <a:rPr sz="1200" i="1" dirty="0">
+                <a:solidFill>
+                  <a:srgbClr val="6EB58F"/>
+                </a:solidFill>
+                <a:latin typeface="Consolas"/>
+              </a:rPr>
+              <a:t> 2 canales</a:t>
             </a:r>
           </a:p>
           <a:p>
@@ -5951,51 +6409,47 @@
               </a:spcAft>
             </a:pPr>
             <a:r>
-              <a:rPr sz="1200">
+              <a:rPr sz="1200" dirty="0" err="1">
                 <a:solidFill>
                   <a:srgbClr val="DFE9F2"/>
                 </a:solidFill>
                 <a:latin typeface="Consolas"/>
               </a:rPr>
-              <a:t>HAL_DAC_Start(&amp;hdac, DAC_CHANNEL_2);          </a:t>
-            </a:r>
-            <a:r>
-              <a:rPr sz="1200" i="1">
+              <a:t>HAL_TIM_Base_Start_IT</a:t>
+            </a:r>
+            <a:r>
+              <a:rPr sz="1200" dirty="0">
+                <a:solidFill>
+                  <a:srgbClr val="DFE9F2"/>
+                </a:solidFill>
+                <a:latin typeface="Consolas"/>
+              </a:rPr>
+              <a:t>(&amp;htim2);                </a:t>
+            </a:r>
+            <a:r>
+              <a:rPr sz="1200" i="1" dirty="0">
                 <a:solidFill>
                   <a:srgbClr val="6EB58F"/>
                 </a:solidFill>
                 <a:latin typeface="Consolas"/>
               </a:rPr>
-              <a:t>// arranca los 2 canales</a:t>
-            </a:r>
-          </a:p>
-          <a:p>
-            <a:pPr algn="l">
-              <a:lnSpc>
-                <a:spcPct val="105000"/>
-              </a:lnSpc>
-              <a:spcAft>
-                <a:spcPts val="0"/>
-              </a:spcAft>
-            </a:pPr>
-            <a:r>
-              <a:rPr sz="1200">
-                <a:solidFill>
-                  <a:srgbClr val="DFE9F2"/>
+              <a:t>// timer CON </a:t>
+            </a:r>
+            <a:r>
+              <a:rPr sz="1200" i="1" dirty="0" err="1">
+                <a:solidFill>
+                  <a:srgbClr val="6EB58F"/>
                 </a:solidFill>
                 <a:latin typeface="Consolas"/>
               </a:rPr>
-              <a:t>HAL_TIM_Base_Start_IT(&amp;htim2);                </a:t>
-            </a:r>
-            <a:r>
-              <a:rPr sz="1200" i="1">
-                <a:solidFill>
-                  <a:srgbClr val="6EB58F"/>
-                </a:solidFill>
-                <a:latin typeface="Consolas"/>
-              </a:rPr>
-              <a:t>// timer CON interrupcion</a:t>
-            </a:r>
+              <a:t>interrupcion</a:t>
+            </a:r>
+            <a:endParaRPr sz="1200" i="1" dirty="0">
+              <a:solidFill>
+                <a:srgbClr val="6EB58F"/>
+              </a:solidFill>
+              <a:latin typeface="Consolas"/>
+            </a:endParaRPr>
           </a:p>
         </p:txBody>
       </p:sp>
@@ -6352,7 +6806,7 @@
           <a:p>
             <a:pPr algn="l"/>
             <a:r>
-              <a:rPr sz="1200" b="1" i="0">
+              <a:rPr sz="1200" b="1" i="0" dirty="0">
                 <a:solidFill>
                   <a:srgbClr val="3AD1E0"/>
                 </a:solidFill>
@@ -6591,13 +7045,31 @@
               </a:spcAft>
             </a:pPr>
             <a:r>
-              <a:rPr sz="1050" i="1">
+              <a:rPr sz="1050" i="1" dirty="0">
                 <a:solidFill>
                   <a:srgbClr val="6EB58F"/>
                 </a:solidFill>
                 <a:latin typeface="Consolas"/>
               </a:rPr>
-              <a:t>/* lee un caracter de la terminal (UART) */</a:t>
+              <a:t>/* lee un </a:t>
+            </a:r>
+            <a:r>
+              <a:rPr sz="1050" i="1" dirty="0" err="1">
+                <a:solidFill>
+                  <a:srgbClr val="6EB58F"/>
+                </a:solidFill>
+                <a:latin typeface="Consolas"/>
+              </a:rPr>
+              <a:t>caracter</a:t>
+            </a:r>
+            <a:r>
+              <a:rPr sz="1050" i="1" dirty="0">
+                <a:solidFill>
+                  <a:srgbClr val="6EB58F"/>
+                </a:solidFill>
+                <a:latin typeface="Consolas"/>
+              </a:rPr>
+              <a:t> de la terminal (UART) */</a:t>
             </a:r>
           </a:p>
           <a:p>
@@ -6610,13 +7082,22 @@
               </a:spcAft>
             </a:pPr>
             <a:r>
-              <a:rPr sz="1050">
+              <a:rPr sz="1050" dirty="0" err="1">
                 <a:solidFill>
                   <a:srgbClr val="DFE9F2"/>
                 </a:solidFill>
                 <a:latin typeface="Consolas"/>
               </a:rPr>
-              <a:t>HAL_UART_Receive(&amp;huart2, &amp;c, 1, HAL_MAX_DELAY);</a:t>
+              <a:t>HAL_UART_Receive</a:t>
+            </a:r>
+            <a:r>
+              <a:rPr sz="1050" dirty="0">
+                <a:solidFill>
+                  <a:srgbClr val="DFE9F2"/>
+                </a:solidFill>
+                <a:latin typeface="Consolas"/>
+              </a:rPr>
+              <a:t>(&amp;huart2, &amp;c, 1, HAL_MAX_DELAY);</a:t>
             </a:r>
           </a:p>
           <a:p>
@@ -6629,7 +7110,7 @@
               </a:spcAft>
             </a:pPr>
             <a:r>
-              <a:rPr sz="1050">
+              <a:rPr sz="1050" dirty="0">
                 <a:solidFill>
                   <a:srgbClr val="DFE9F2"/>
                 </a:solidFill>
@@ -6648,7 +7129,7 @@
               </a:spcAft>
             </a:pPr>
             <a:r>
-              <a:rPr sz="1050">
+              <a:rPr sz="1050" dirty="0">
                 <a:solidFill>
                   <a:srgbClr val="DFE9F2"/>
                 </a:solidFill>
@@ -6667,23 +7148,74 @@
               </a:spcAft>
             </a:pPr>
             <a:r>
-              <a:rPr sz="1050">
+              <a:rPr sz="1050" dirty="0">
                 <a:solidFill>
                   <a:srgbClr val="DFE9F2"/>
                 </a:solidFill>
                 <a:latin typeface="Consolas"/>
               </a:rPr>
-              <a:t>    numero = numero*10 + (c - '0');   </a:t>
-            </a:r>
-            <a:r>
-              <a:rPr sz="1050" i="1">
+              <a:t>    </a:t>
+            </a:r>
+            <a:r>
+              <a:rPr sz="1050" dirty="0" err="1">
+                <a:solidFill>
+                  <a:srgbClr val="DFE9F2"/>
+                </a:solidFill>
+                <a:latin typeface="Consolas"/>
+              </a:rPr>
+              <a:t>numero</a:t>
+            </a:r>
+            <a:r>
+              <a:rPr sz="1050" dirty="0">
+                <a:solidFill>
+                  <a:srgbClr val="DFE9F2"/>
+                </a:solidFill>
+                <a:latin typeface="Consolas"/>
+              </a:rPr>
+              <a:t> = </a:t>
+            </a:r>
+            <a:r>
+              <a:rPr sz="1050" dirty="0" err="1">
+                <a:solidFill>
+                  <a:srgbClr val="DFE9F2"/>
+                </a:solidFill>
+                <a:latin typeface="Consolas"/>
+              </a:rPr>
+              <a:t>numero</a:t>
+            </a:r>
+            <a:r>
+              <a:rPr sz="1050" dirty="0">
+                <a:solidFill>
+                  <a:srgbClr val="DFE9F2"/>
+                </a:solidFill>
+                <a:latin typeface="Consolas"/>
+              </a:rPr>
+              <a:t>*10 + (c - '0');   </a:t>
+            </a:r>
+            <a:r>
+              <a:rPr sz="1050" i="1" dirty="0">
                 <a:solidFill>
                   <a:srgbClr val="6EB58F"/>
                 </a:solidFill>
                 <a:latin typeface="Consolas"/>
               </a:rPr>
-              <a:t>// arma el numero</a:t>
-            </a:r>
+              <a:t>// arma el </a:t>
+            </a:r>
+            <a:r>
+              <a:rPr sz="1050" i="1" dirty="0" err="1">
+                <a:solidFill>
+                  <a:srgbClr val="6EB58F"/>
+                </a:solidFill>
+                <a:latin typeface="Consolas"/>
+              </a:rPr>
+              <a:t>numero</a:t>
+            </a:r>
+            <a:endParaRPr sz="1050" i="1" dirty="0">
+              <a:solidFill>
+                <a:srgbClr val="6EB58F"/>
+              </a:solidFill>
+              <a:latin typeface="Consolas"/>
+            </a:endParaRPr>
           </a:p>
           <a:p>
             <a:pPr algn="l">
@@ -6695,7 +7227,7 @@
               </a:spcAft>
             </a:pPr>
             <a:r>
-              <a:rPr sz="1050">
+              <a:rPr sz="1050" dirty="0">
                 <a:solidFill>
                   <a:srgbClr val="DFE9F2"/>
                 </a:solidFill>
@@ -6714,23 +7246,92 @@
               </a:spcAft>
             </a:pPr>
             <a:r>
-              <a:rPr sz="1050">
+              <a:rPr sz="1050" dirty="0">
                 <a:solidFill>
                   <a:srgbClr val="DFE9F2"/>
                 </a:solidFill>
                 <a:latin typeface="Consolas"/>
               </a:rPr>
-              <a:t>    ftw[canal] = numero*2^32/48000;   </a:t>
-            </a:r>
-            <a:r>
-              <a:rPr sz="1050" i="1">
+              <a:t>    </a:t>
+            </a:r>
+            <a:r>
+              <a:rPr sz="1050" dirty="0" err="1">
+                <a:solidFill>
+                  <a:srgbClr val="DFE9F2"/>
+                </a:solidFill>
+                <a:latin typeface="Consolas"/>
+              </a:rPr>
+              <a:t>ftw</a:t>
+            </a:r>
+            <a:r>
+              <a:rPr sz="1050" dirty="0">
+                <a:solidFill>
+                  <a:srgbClr val="DFE9F2"/>
+                </a:solidFill>
+                <a:latin typeface="Consolas"/>
+              </a:rPr>
+              <a:t>[canal] = </a:t>
+            </a:r>
+            <a:r>
+              <a:rPr sz="1050" dirty="0" err="1">
+                <a:solidFill>
+                  <a:srgbClr val="DFE9F2"/>
+                </a:solidFill>
+                <a:latin typeface="Consolas"/>
+              </a:rPr>
+              <a:t>numero</a:t>
+            </a:r>
+            <a:r>
+              <a:rPr sz="1050" dirty="0">
+                <a:solidFill>
+                  <a:srgbClr val="DFE9F2"/>
+                </a:solidFill>
+                <a:latin typeface="Consolas"/>
+              </a:rPr>
+              <a:t>*2^32/48000;   </a:t>
+            </a:r>
+            <a:r>
+              <a:rPr sz="1050" i="1" dirty="0">
                 <a:solidFill>
                   <a:srgbClr val="6EB58F"/>
                 </a:solidFill>
                 <a:latin typeface="Consolas"/>
               </a:rPr>
-              <a:t>// Enter: fija freq</a:t>
-            </a:r>
+              <a:t>// Enter: </a:t>
+            </a:r>
+            <a:r>
+              <a:rPr sz="1050" i="1" dirty="0" err="1">
+                <a:solidFill>
+                  <a:srgbClr val="6EB58F"/>
+                </a:solidFill>
+                <a:latin typeface="Consolas"/>
+              </a:rPr>
+              <a:t>fija</a:t>
+            </a:r>
+            <a:r>
+              <a:rPr sz="1050" i="1" dirty="0">
+                <a:solidFill>
+                  <a:srgbClr val="6EB58F"/>
+                </a:solidFill>
+                <a:latin typeface="Consolas"/>
+              </a:rPr>
+              <a:t> </a:t>
+            </a:r>
+            <a:r>
+              <a:rPr sz="1050" i="1" dirty="0" err="1">
+                <a:solidFill>
+                  <a:srgbClr val="6EB58F"/>
+                </a:solidFill>
+                <a:latin typeface="Consolas"/>
+              </a:rPr>
+              <a:t>freq</a:t>
+            </a:r>
+            <a:endParaRPr sz="1050" i="1" dirty="0">
+              <a:solidFill>
+                <a:srgbClr val="6EB58F"/>
+              </a:solidFill>
+              <a:latin typeface="Consolas"/>
+            </a:endParaRPr>
           </a:p>
           <a:p>
             <a:pPr algn="l">
@@ -6742,13 +7343,31 @@
               </a:spcAft>
             </a:pPr>
             <a:r>
-              <a:rPr sz="1050">
+              <a:rPr sz="1050" dirty="0">
                 <a:solidFill>
                   <a:srgbClr val="DFE9F2"/>
                 </a:solidFill>
                 <a:latin typeface="Consolas"/>
               </a:rPr>
-              <a:t>    numero = 0;</a:t>
+              <a:t>    </a:t>
+            </a:r>
+            <a:r>
+              <a:rPr sz="1050" dirty="0" err="1">
+                <a:solidFill>
+                  <a:srgbClr val="DFE9F2"/>
+                </a:solidFill>
+                <a:latin typeface="Consolas"/>
+              </a:rPr>
+              <a:t>numero</a:t>
+            </a:r>
+            <a:r>
+              <a:rPr sz="1050" dirty="0">
+                <a:solidFill>
+                  <a:srgbClr val="DFE9F2"/>
+                </a:solidFill>
+                <a:latin typeface="Consolas"/>
+              </a:rPr>
+              <a:t> = 0;</a:t>
             </a:r>
           </a:p>
           <a:p>
@@ -6761,7 +7380,7 @@
               </a:spcAft>
             </a:pPr>
             <a:r>
-              <a:rPr sz="1050">
+              <a:rPr sz="1050" dirty="0">
                 <a:solidFill>
                   <a:srgbClr val="DFE9F2"/>
                 </a:solidFill>
@@ -6780,7 +7399,7 @@
               </a:spcAft>
             </a:pPr>
             <a:r>
-              <a:rPr sz="1050">
+              <a:rPr sz="1050" dirty="0">
                 <a:solidFill>
                   <a:srgbClr val="DFE9F2"/>
                 </a:solidFill>
@@ -6789,7 +7408,7 @@
               <a:t>else if (c==' ') canal ^= 1;          </a:t>
             </a:r>
             <a:r>
-              <a:rPr sz="1050" i="1">
+              <a:rPr sz="1050" i="1" dirty="0">
                 <a:solidFill>
                   <a:srgbClr val="6EB58F"/>
                 </a:solidFill>
@@ -6808,16 +7427,34 @@
               </a:spcAft>
             </a:pPr>
             <a:r>
-              <a:rPr sz="1050">
+              <a:rPr sz="1050" dirty="0">
                 <a:solidFill>
                   <a:srgbClr val="DFE9F2"/>
                 </a:solidFill>
                 <a:latin typeface="Consolas"/>
               </a:rPr>
-              <a:t>else if (c=='p') salida_on[canal]=1;  </a:t>
-            </a:r>
-            <a:r>
-              <a:rPr sz="1050" i="1">
+              <a:t>else if (c=='p') </a:t>
+            </a:r>
+            <a:r>
+              <a:rPr sz="1050" dirty="0" err="1">
+                <a:solidFill>
+                  <a:srgbClr val="DFE9F2"/>
+                </a:solidFill>
+                <a:latin typeface="Consolas"/>
+              </a:rPr>
+              <a:t>salida_on</a:t>
+            </a:r>
+            <a:r>
+              <a:rPr sz="1050" dirty="0">
+                <a:solidFill>
+                  <a:srgbClr val="DFE9F2"/>
+                </a:solidFill>
+                <a:latin typeface="Consolas"/>
+              </a:rPr>
+              <a:t>[canal]=1;  </a:t>
+            </a:r>
+            <a:r>
+              <a:rPr sz="1050" i="1" dirty="0">
                 <a:solidFill>
                   <a:srgbClr val="6EB58F"/>
                 </a:solidFill>
@@ -6836,16 +7473,34 @@
               </a:spcAft>
             </a:pPr>
             <a:r>
-              <a:rPr sz="1050">
+              <a:rPr sz="1050" dirty="0">
                 <a:solidFill>
                   <a:srgbClr val="DFE9F2"/>
                 </a:solidFill>
                 <a:latin typeface="Consolas"/>
               </a:rPr>
-              <a:t>else if (c=='s') salida_on[canal]=0;  </a:t>
-            </a:r>
-            <a:r>
-              <a:rPr sz="1050" i="1">
+              <a:t>else if (c=='s') </a:t>
+            </a:r>
+            <a:r>
+              <a:rPr sz="1050" dirty="0" err="1">
+                <a:solidFill>
+                  <a:srgbClr val="DFE9F2"/>
+                </a:solidFill>
+                <a:latin typeface="Consolas"/>
+              </a:rPr>
+              <a:t>salida_on</a:t>
+            </a:r>
+            <a:r>
+              <a:rPr sz="1050" dirty="0">
+                <a:solidFill>
+                  <a:srgbClr val="DFE9F2"/>
+                </a:solidFill>
+                <a:latin typeface="Consolas"/>
+              </a:rPr>
+              <a:t>[canal]=0;  </a:t>
+            </a:r>
+            <a:r>
+              <a:rPr sz="1050" i="1" dirty="0">
                 <a:solidFill>
                   <a:srgbClr val="6EB58F"/>
                 </a:solidFill>
@@ -6864,7 +7519,7 @@
               </a:spcAft>
             </a:pPr>
             <a:r>
-              <a:rPr sz="1050">
+              <a:rPr sz="1050" dirty="0">
                 <a:solidFill>
                   <a:srgbClr val="DFE9F2"/>
                 </a:solidFill>
@@ -6873,14 +7528,47 @@
               <a:t>else if (c=='+') amp[canal]+=AMP_STEP;</a:t>
             </a:r>
             <a:r>
-              <a:rPr sz="1050" i="1">
+              <a:rPr sz="1050" i="1" dirty="0">
                 <a:solidFill>
                   <a:srgbClr val="6EB58F"/>
                 </a:solidFill>
                 <a:latin typeface="Consolas"/>
               </a:rPr>
-              <a:t>// sube amplitud</a:t>
-            </a:r>
+              <a:t>// </a:t>
+            </a:r>
+            <a:r>
+              <a:rPr sz="1050" i="1" dirty="0" err="1">
+                <a:solidFill>
+                  <a:srgbClr val="6EB58F"/>
+                </a:solidFill>
+                <a:latin typeface="Consolas"/>
+              </a:rPr>
+              <a:t>sube</a:t>
+            </a:r>
+            <a:r>
+              <a:rPr sz="1050" i="1" dirty="0">
+                <a:solidFill>
+                  <a:srgbClr val="6EB58F"/>
+                </a:solidFill>
+                <a:latin typeface="Consolas"/>
+              </a:rPr>
+              <a:t> </a:t>
+            </a:r>
+            <a:r>
+              <a:rPr sz="1050" i="1" dirty="0" err="1">
+                <a:solidFill>
+                  <a:srgbClr val="6EB58F"/>
+                </a:solidFill>
+                <a:latin typeface="Consolas"/>
+              </a:rPr>
+              <a:t>amplitud</a:t>
+            </a:r>
+            <a:endParaRPr sz="1050" i="1" dirty="0">
+              <a:solidFill>
+                <a:srgbClr val="6EB58F"/>
+              </a:solidFill>
+              <a:latin typeface="Consolas"/>
+            </a:endParaRPr>
           </a:p>
           <a:p>
             <a:pPr algn="l">
@@ -6892,7 +7580,7 @@
               </a:spcAft>
             </a:pPr>
             <a:r>
-              <a:rPr sz="1050">
+              <a:rPr sz="1050" dirty="0">
                 <a:solidFill>
                   <a:srgbClr val="DFE9F2"/>
                 </a:solidFill>
@@ -6901,14 +7589,29 @@
               <a:t>else if (c=='-') amp[canal]-=AMP_STEP;</a:t>
             </a:r>
             <a:r>
-              <a:rPr sz="1050" i="1">
+              <a:rPr sz="1050" i="1" dirty="0">
                 <a:solidFill>
                   <a:srgbClr val="6EB58F"/>
                 </a:solidFill>
                 <a:latin typeface="Consolas"/>
               </a:rPr>
-              <a:t>// baja amplitud</a:t>
-            </a:r>
+              <a:t>// baja </a:t>
+            </a:r>
+            <a:r>
+              <a:rPr sz="1050" i="1" dirty="0" err="1">
+                <a:solidFill>
+                  <a:srgbClr val="6EB58F"/>
+                </a:solidFill>
+                <a:latin typeface="Consolas"/>
+              </a:rPr>
+              <a:t>amplitud</a:t>
+            </a:r>
+            <a:endParaRPr sz="1050" i="1" dirty="0">
+              <a:solidFill>
+                <a:srgbClr val="6EB58F"/>
+              </a:solidFill>
+              <a:latin typeface="Consolas"/>
+            </a:endParaRPr>
           </a:p>
         </p:txBody>
       </p:sp>
@@ -7048,7 +7751,7 @@
         <p:spPr>
           <a:xfrm>
             <a:off x="6510528" y="2231136"/>
-            <a:ext cx="5074920" cy="3172968"/>
+            <a:ext cx="3860292" cy="2367508"/>
           </a:xfrm>
           <a:prstGeom prst="rect">
             <a:avLst/>
@@ -7056,7 +7759,7 @@
           <a:noFill/>
         </p:spPr>
         <p:txBody>
-          <a:bodyPr wrap="none" lIns="0" tIns="0" rIns="0" bIns="0" anchor="t">
+          <a:bodyPr wrap="square" lIns="0" tIns="0" rIns="0" bIns="0" anchor="t">
             <a:spAutoFit/>
           </a:bodyPr>
           <a:lstStyle/>
@@ -7070,13 +7773,189 @@
               </a:spcAft>
             </a:pPr>
             <a:r>
-              <a:rPr sz="1050" i="1">
+              <a:rPr sz="1050" i="1" dirty="0">
                 <a:solidFill>
                   <a:srgbClr val="6EB58F"/>
                 </a:solidFill>
                 <a:latin typeface="Consolas"/>
               </a:rPr>
-              <a:t>/* el corazon: se dispara a fs = 48 kHz */</a:t>
+              <a:t>/</a:t>
+            </a:r>
+            <a:r>
+              <a:rPr lang="es-AR" sz="1050" i="1" dirty="0">
+                <a:solidFill>
+                  <a:srgbClr val="6EB58F"/>
+                </a:solidFill>
+                <a:latin typeface="Consolas"/>
+              </a:rPr>
+              <a:t>* </a:t>
+            </a:r>
+            <a:r>
+              <a:rPr sz="1050" i="1" dirty="0">
+                <a:solidFill>
+                  <a:srgbClr val="6EB58F"/>
+                </a:solidFill>
+                <a:latin typeface="Consolas"/>
+              </a:rPr>
+              <a:t>se </a:t>
+            </a:r>
+            <a:r>
+              <a:rPr sz="1050" i="1" dirty="0" err="1">
+                <a:solidFill>
+                  <a:srgbClr val="6EB58F"/>
+                </a:solidFill>
+                <a:latin typeface="Consolas"/>
+              </a:rPr>
+              <a:t>dispara</a:t>
+            </a:r>
+            <a:r>
+              <a:rPr sz="1050" i="1" dirty="0">
+                <a:solidFill>
+                  <a:srgbClr val="6EB58F"/>
+                </a:solidFill>
+                <a:latin typeface="Consolas"/>
+              </a:rPr>
+              <a:t> a fs = 48 kHz */</a:t>
+            </a:r>
+          </a:p>
+          <a:p>
+            <a:pPr>
+              <a:lnSpc>
+                <a:spcPct val="105000"/>
+              </a:lnSpc>
+            </a:pPr>
+            <a:r>
+              <a:rPr sz="1050" dirty="0">
+                <a:solidFill>
+                  <a:srgbClr val="DFE9F2"/>
+                </a:solidFill>
+                <a:latin typeface="Consolas"/>
+              </a:rPr>
+              <a:t>acc[</a:t>
+            </a:r>
+            <a:r>
+              <a:rPr lang="es-AR" sz="1050" dirty="0">
+                <a:solidFill>
+                  <a:srgbClr val="DFE9F2"/>
+                </a:solidFill>
+                <a:latin typeface="Consolas"/>
+              </a:rPr>
+              <a:t>CANAL_L</a:t>
+            </a:r>
+            <a:r>
+              <a:rPr sz="1050" dirty="0">
+                <a:solidFill>
+                  <a:srgbClr val="DFE9F2"/>
+                </a:solidFill>
+                <a:latin typeface="Consolas"/>
+              </a:rPr>
+              <a:t>] += </a:t>
+            </a:r>
+            <a:r>
+              <a:rPr sz="1050" dirty="0" err="1">
+                <a:solidFill>
+                  <a:srgbClr val="DFE9F2"/>
+                </a:solidFill>
+                <a:latin typeface="Consolas"/>
+              </a:rPr>
+              <a:t>ftw</a:t>
+            </a:r>
+            <a:r>
+              <a:rPr sz="1050" dirty="0">
+                <a:solidFill>
+                  <a:srgbClr val="DFE9F2"/>
+                </a:solidFill>
+                <a:latin typeface="Consolas"/>
+              </a:rPr>
+              <a:t>[</a:t>
+            </a:r>
+            <a:r>
+              <a:rPr lang="es-AR" sz="1050" dirty="0">
+                <a:solidFill>
+                  <a:srgbClr val="DFE9F2"/>
+                </a:solidFill>
+                <a:latin typeface="Consolas"/>
+              </a:rPr>
+              <a:t>CANAL_L</a:t>
+            </a:r>
+            <a:r>
+              <a:rPr sz="1050" dirty="0">
+                <a:solidFill>
+                  <a:srgbClr val="DFE9F2"/>
+                </a:solidFill>
+                <a:latin typeface="Consolas"/>
+              </a:rPr>
+              <a:t>];</a:t>
+            </a:r>
+          </a:p>
+          <a:p>
+            <a:pPr>
+              <a:lnSpc>
+                <a:spcPct val="105000"/>
+              </a:lnSpc>
+            </a:pPr>
+            <a:r>
+              <a:rPr sz="1050" dirty="0">
+                <a:solidFill>
+                  <a:srgbClr val="DFE9F2"/>
+                </a:solidFill>
+                <a:latin typeface="Consolas"/>
+              </a:rPr>
+              <a:t>acc[</a:t>
+            </a:r>
+            <a:r>
+              <a:rPr lang="es-AR" sz="1050" dirty="0">
+                <a:solidFill>
+                  <a:srgbClr val="DFE9F2"/>
+                </a:solidFill>
+                <a:latin typeface="Consolas"/>
+              </a:rPr>
+              <a:t>CANAL_R</a:t>
+            </a:r>
+            <a:r>
+              <a:rPr sz="1050" dirty="0">
+                <a:solidFill>
+                  <a:srgbClr val="DFE9F2"/>
+                </a:solidFill>
+                <a:latin typeface="Consolas"/>
+              </a:rPr>
+              <a:t>] += </a:t>
+            </a:r>
+            <a:r>
+              <a:rPr sz="1050" dirty="0" err="1">
+                <a:solidFill>
+                  <a:srgbClr val="DFE9F2"/>
+                </a:solidFill>
+                <a:latin typeface="Consolas"/>
+              </a:rPr>
+              <a:t>ftw</a:t>
+            </a:r>
+            <a:r>
+              <a:rPr sz="1050" dirty="0">
+                <a:solidFill>
+                  <a:srgbClr val="DFE9F2"/>
+                </a:solidFill>
+                <a:latin typeface="Consolas"/>
+              </a:rPr>
+              <a:t>[</a:t>
+            </a:r>
+            <a:r>
+              <a:rPr lang="es-AR" sz="1050" dirty="0">
+                <a:solidFill>
+                  <a:srgbClr val="DFE9F2"/>
+                </a:solidFill>
+                <a:latin typeface="Consolas"/>
+              </a:rPr>
+              <a:t>CANAL_R</a:t>
+            </a:r>
+            <a:r>
+              <a:rPr sz="1050" dirty="0">
+                <a:solidFill>
+                  <a:srgbClr val="DFE9F2"/>
+                </a:solidFill>
+                <a:latin typeface="Consolas"/>
+              </a:rPr>
+              <a:t>];</a:t>
             </a:r>
           </a:p>
           <a:p>
@@ -7089,13 +7968,13 @@
               </a:spcAft>
             </a:pPr>
             <a:r>
-              <a:rPr sz="1050">
+              <a:rPr sz="1050" dirty="0">
                 <a:solidFill>
                   <a:srgbClr val="DFE9F2"/>
                 </a:solidFill>
                 <a:latin typeface="Consolas"/>
               </a:rPr>
-              <a:t>acc[0] += ftw[0];</a:t>
+              <a:t> </a:t>
             </a:r>
           </a:p>
           <a:p>
@@ -7108,13 +7987,171 @@
               </a:spcAft>
             </a:pPr>
             <a:r>
-              <a:rPr sz="1050">
+              <a:rPr sz="1050" i="1" dirty="0">
+                <a:solidFill>
+                  <a:srgbClr val="6EB58F"/>
+                </a:solidFill>
+                <a:latin typeface="Consolas"/>
+              </a:rPr>
+              <a:t>// </a:t>
+            </a:r>
+            <a:r>
+              <a:rPr sz="1050" i="1" dirty="0" err="1">
+                <a:solidFill>
+                  <a:srgbClr val="6EB58F"/>
+                </a:solidFill>
+                <a:latin typeface="Consolas"/>
+              </a:rPr>
+              <a:t>centrar</a:t>
+            </a:r>
+            <a:r>
+              <a:rPr sz="1050" i="1" dirty="0">
+                <a:solidFill>
+                  <a:srgbClr val="6EB58F"/>
+                </a:solidFill>
+                <a:latin typeface="Consolas"/>
+              </a:rPr>
+              <a:t> la </a:t>
+            </a:r>
+            <a:r>
+              <a:rPr sz="1050" i="1" dirty="0" err="1">
+                <a:solidFill>
+                  <a:srgbClr val="6EB58F"/>
+                </a:solidFill>
+                <a:latin typeface="Consolas"/>
+              </a:rPr>
+              <a:t>muestra</a:t>
+            </a:r>
+            <a:r>
+              <a:rPr sz="1050" i="1" dirty="0">
+                <a:solidFill>
+                  <a:srgbClr val="6EB58F"/>
+                </a:solidFill>
+                <a:latin typeface="Consolas"/>
+              </a:rPr>
+              <a:t> </a:t>
+            </a:r>
+            <a:r>
+              <a:rPr sz="1050" i="1" dirty="0" err="1">
+                <a:solidFill>
+                  <a:srgbClr val="6EB58F"/>
+                </a:solidFill>
+                <a:latin typeface="Consolas"/>
+              </a:rPr>
+              <a:t>en</a:t>
+            </a:r>
+            <a:r>
+              <a:rPr sz="1050" i="1" dirty="0">
+                <a:solidFill>
+                  <a:srgbClr val="6EB58F"/>
+                </a:solidFill>
+                <a:latin typeface="Consolas"/>
+              </a:rPr>
+              <a:t> 0</a:t>
+            </a:r>
+          </a:p>
+          <a:p>
+            <a:pPr>
+              <a:lnSpc>
+                <a:spcPct val="105000"/>
+              </a:lnSpc>
+            </a:pPr>
+            <a:r>
+              <a:rPr sz="1050" dirty="0">
                 <a:solidFill>
                   <a:srgbClr val="DFE9F2"/>
                 </a:solidFill>
                 <a:latin typeface="Consolas"/>
               </a:rPr>
-              <a:t>acc[1] += ftw[1];</a:t>
+              <a:t>int32_t c0 = </a:t>
+            </a:r>
+            <a:r>
+              <a:rPr sz="1050" dirty="0" err="1">
+                <a:solidFill>
+                  <a:srgbClr val="DFE9F2"/>
+                </a:solidFill>
+                <a:latin typeface="Consolas"/>
+              </a:rPr>
+              <a:t>sine_table</a:t>
+            </a:r>
+            <a:r>
+              <a:rPr sz="1050" dirty="0">
+                <a:solidFill>
+                  <a:srgbClr val="DFE9F2"/>
+                </a:solidFill>
+                <a:latin typeface="Consolas"/>
+              </a:rPr>
+              <a:t>[acc[</a:t>
+            </a:r>
+            <a:r>
+              <a:rPr lang="es-AR" sz="1050" dirty="0">
+                <a:solidFill>
+                  <a:srgbClr val="DFE9F2"/>
+                </a:solidFill>
+                <a:latin typeface="Consolas"/>
+              </a:rPr>
+              <a:t>CANAL_L</a:t>
+            </a:r>
+            <a:r>
+              <a:rPr sz="1050" dirty="0">
+                <a:solidFill>
+                  <a:srgbClr val="DFE9F2"/>
+                </a:solidFill>
+                <a:latin typeface="Consolas"/>
+              </a:rPr>
+              <a:t>]&gt;&gt;19] - 2048;</a:t>
+            </a:r>
+          </a:p>
+          <a:p>
+            <a:pPr>
+              <a:lnSpc>
+                <a:spcPct val="105000"/>
+              </a:lnSpc>
+            </a:pPr>
+            <a:r>
+              <a:rPr sz="1050" dirty="0">
+                <a:solidFill>
+                  <a:srgbClr val="DFE9F2"/>
+                </a:solidFill>
+                <a:latin typeface="Consolas"/>
+              </a:rPr>
+              <a:t>int32_t c1 = </a:t>
+            </a:r>
+            <a:r>
+              <a:rPr sz="1050" dirty="0" err="1">
+                <a:solidFill>
+                  <a:srgbClr val="DFE9F2"/>
+                </a:solidFill>
+                <a:latin typeface="Consolas"/>
+              </a:rPr>
+              <a:t>sine_table</a:t>
+            </a:r>
+            <a:r>
+              <a:rPr sz="1050" dirty="0">
+                <a:solidFill>
+                  <a:srgbClr val="DFE9F2"/>
+                </a:solidFill>
+                <a:latin typeface="Consolas"/>
+              </a:rPr>
+              <a:t>[acc[</a:t>
+            </a:r>
+            <a:r>
+              <a:rPr lang="es-AR" sz="1050" dirty="0">
+                <a:solidFill>
+                  <a:srgbClr val="DFE9F2"/>
+                </a:solidFill>
+                <a:latin typeface="Consolas"/>
+              </a:rPr>
+              <a:t>CANAL_R</a:t>
+            </a:r>
+            <a:r>
+              <a:rPr sz="1050" dirty="0">
+                <a:solidFill>
+                  <a:srgbClr val="DFE9F2"/>
+                </a:solidFill>
+                <a:latin typeface="Consolas"/>
+              </a:rPr>
+              <a:t>]&gt;&gt;19] - 2048;</a:t>
             </a:r>
           </a:p>
           <a:p>
@@ -7127,7 +8164,7 @@
               </a:spcAft>
             </a:pPr>
             <a:r>
-              <a:rPr sz="1050">
+              <a:rPr sz="1050" dirty="0">
                 <a:solidFill>
                   <a:srgbClr val="DFE9F2"/>
                 </a:solidFill>
@@ -7146,13 +8183,150 @@
               </a:spcAft>
             </a:pPr>
             <a:r>
-              <a:rPr sz="1050" i="1">
+              <a:rPr sz="1050" i="1" dirty="0">
                 <a:solidFill>
                   <a:srgbClr val="6EB58F"/>
                 </a:solidFill>
                 <a:latin typeface="Consolas"/>
               </a:rPr>
-              <a:t>// centrar la muestra en 0</a:t>
+              <a:t>// </a:t>
+            </a:r>
+            <a:r>
+              <a:rPr sz="1050" i="1" dirty="0" err="1">
+                <a:solidFill>
+                  <a:srgbClr val="6EB58F"/>
+                </a:solidFill>
+                <a:latin typeface="Consolas"/>
+              </a:rPr>
+              <a:t>escalar</a:t>
+            </a:r>
+            <a:r>
+              <a:rPr sz="1050" i="1" dirty="0">
+                <a:solidFill>
+                  <a:srgbClr val="6EB58F"/>
+                </a:solidFill>
+                <a:latin typeface="Consolas"/>
+              </a:rPr>
+              <a:t> </a:t>
+            </a:r>
+            <a:r>
+              <a:rPr sz="1050" i="1" dirty="0" err="1">
+                <a:solidFill>
+                  <a:srgbClr val="6EB58F"/>
+                </a:solidFill>
+                <a:latin typeface="Consolas"/>
+              </a:rPr>
+              <a:t>amplitud</a:t>
+            </a:r>
+            <a:r>
+              <a:rPr sz="1050" i="1" dirty="0">
+                <a:solidFill>
+                  <a:srgbClr val="6EB58F"/>
+                </a:solidFill>
+                <a:latin typeface="Consolas"/>
+              </a:rPr>
+              <a:t> y </a:t>
+            </a:r>
+            <a:r>
+              <a:rPr sz="1050" i="1" dirty="0" err="1">
+                <a:solidFill>
+                  <a:srgbClr val="6EB58F"/>
+                </a:solidFill>
+                <a:latin typeface="Consolas"/>
+              </a:rPr>
+              <a:t>volver</a:t>
+            </a:r>
+            <a:r>
+              <a:rPr sz="1050" i="1" dirty="0">
+                <a:solidFill>
+                  <a:srgbClr val="6EB58F"/>
+                </a:solidFill>
+                <a:latin typeface="Consolas"/>
+              </a:rPr>
+              <a:t> a </a:t>
+            </a:r>
+            <a:r>
+              <a:rPr sz="1050" i="1" dirty="0" err="1">
+                <a:solidFill>
+                  <a:srgbClr val="6EB58F"/>
+                </a:solidFill>
+                <a:latin typeface="Consolas"/>
+              </a:rPr>
+              <a:t>centrar</a:t>
+            </a:r>
+            <a:endParaRPr sz="1050" i="1" dirty="0">
+              <a:solidFill>
+                <a:srgbClr val="6EB58F"/>
+              </a:solidFill>
+              <a:latin typeface="Consolas"/>
+            </a:endParaRPr>
+          </a:p>
+          <a:p>
+            <a:pPr>
+              <a:lnSpc>
+                <a:spcPct val="105000"/>
+              </a:lnSpc>
+            </a:pPr>
+            <a:r>
+              <a:rPr sz="1050" dirty="0">
+                <a:solidFill>
+                  <a:srgbClr val="DFE9F2"/>
+                </a:solidFill>
+                <a:latin typeface="Consolas"/>
+              </a:rPr>
+              <a:t>v0 = 2048 + (c0 * amp[</a:t>
+            </a:r>
+            <a:r>
+              <a:rPr lang="es-AR" sz="1050" dirty="0">
+                <a:solidFill>
+                  <a:srgbClr val="DFE9F2"/>
+                </a:solidFill>
+                <a:latin typeface="Consolas"/>
+              </a:rPr>
+              <a:t>CANAL_L</a:t>
+            </a:r>
+            <a:r>
+              <a:rPr sz="1050" dirty="0">
+                <a:solidFill>
+                  <a:srgbClr val="DFE9F2"/>
+                </a:solidFill>
+                <a:latin typeface="Consolas"/>
+              </a:rPr>
+              <a:t>]) / 2048;</a:t>
+            </a:r>
+          </a:p>
+          <a:p>
+            <a:pPr>
+              <a:lnSpc>
+                <a:spcPct val="105000"/>
+              </a:lnSpc>
+            </a:pPr>
+            <a:r>
+              <a:rPr sz="1050" dirty="0">
+                <a:solidFill>
+                  <a:srgbClr val="DFE9F2"/>
+                </a:solidFill>
+                <a:latin typeface="Consolas"/>
+              </a:rPr>
+              <a:t>v1 = 2048 + (c1 * amp[</a:t>
+            </a:r>
+            <a:r>
+              <a:rPr lang="es-AR" sz="1050" dirty="0">
+                <a:solidFill>
+                  <a:srgbClr val="DFE9F2"/>
+                </a:solidFill>
+                <a:latin typeface="Consolas"/>
+              </a:rPr>
+              <a:t>CANAL_R</a:t>
+            </a:r>
+            <a:r>
+              <a:rPr sz="1050" dirty="0">
+                <a:solidFill>
+                  <a:srgbClr val="DFE9F2"/>
+                </a:solidFill>
+                <a:latin typeface="Consolas"/>
+              </a:rPr>
+              <a:t>]) / 2048;</a:t>
             </a:r>
           </a:p>
           <a:p>
@@ -7165,13 +8339,13 @@
               </a:spcAft>
             </a:pPr>
             <a:r>
-              <a:rPr sz="1050">
+              <a:rPr sz="1050" dirty="0">
                 <a:solidFill>
                   <a:srgbClr val="DFE9F2"/>
                 </a:solidFill>
                 <a:latin typeface="Consolas"/>
               </a:rPr>
-              <a:t>int32_t c0 = sine_table[acc[0]&gt;&gt;19] - 2048;</a:t>
+              <a:t> </a:t>
             </a:r>
           </a:p>
           <a:p>
@@ -7184,13 +8358,22 @@
               </a:spcAft>
             </a:pPr>
             <a:r>
-              <a:rPr sz="1050">
+              <a:rPr sz="1050" dirty="0" err="1">
                 <a:solidFill>
                   <a:srgbClr val="DFE9F2"/>
                 </a:solidFill>
                 <a:latin typeface="Consolas"/>
               </a:rPr>
-              <a:t>int32_t c1 = sine_table[acc[1]&gt;&gt;19] - 2048;</a:t>
+              <a:t>HAL_DAC_SetValue</a:t>
+            </a:r>
+            <a:r>
+              <a:rPr sz="1050" dirty="0">
+                <a:solidFill>
+                  <a:srgbClr val="DFE9F2"/>
+                </a:solidFill>
+                <a:latin typeface="Consolas"/>
+              </a:rPr>
+              <a:t>(&amp;hdac,DAC_CHANNEL_1,...,v0);</a:t>
             </a:r>
           </a:p>
           <a:p>
@@ -7203,127 +8386,22 @@
               </a:spcAft>
             </a:pPr>
             <a:r>
-              <a:rPr sz="1050">
+              <a:rPr sz="1050" dirty="0" err="1">
                 <a:solidFill>
                   <a:srgbClr val="DFE9F2"/>
                 </a:solidFill>
                 <a:latin typeface="Consolas"/>
               </a:rPr>
-              <a:t> </a:t>
-            </a:r>
-          </a:p>
-          <a:p>
-            <a:pPr algn="l">
-              <a:lnSpc>
-                <a:spcPct val="105000"/>
-              </a:lnSpc>
-              <a:spcAft>
-                <a:spcPts val="0"/>
-              </a:spcAft>
-            </a:pPr>
-            <a:r>
-              <a:rPr sz="1050" i="1">
-                <a:solidFill>
-                  <a:srgbClr val="6EB58F"/>
+              <a:t>HAL_DAC_SetValue</a:t>
+            </a:r>
+            <a:r>
+              <a:rPr sz="1050" dirty="0">
+                <a:solidFill>
+                  <a:srgbClr val="DFE9F2"/>
                 </a:solidFill>
                 <a:latin typeface="Consolas"/>
               </a:rPr>
-              <a:t>// escalar amplitud y volver a centrar</a:t>
-            </a:r>
-          </a:p>
-          <a:p>
-            <a:pPr algn="l">
-              <a:lnSpc>
-                <a:spcPct val="105000"/>
-              </a:lnSpc>
-              <a:spcAft>
-                <a:spcPts val="0"/>
-              </a:spcAft>
-            </a:pPr>
-            <a:r>
-              <a:rPr sz="1050">
-                <a:solidFill>
-                  <a:srgbClr val="DFE9F2"/>
-                </a:solidFill>
-                <a:latin typeface="Consolas"/>
-              </a:rPr>
-              <a:t>v0 = 2048 + (c0 * amp[0]) / 2048;</a:t>
-            </a:r>
-          </a:p>
-          <a:p>
-            <a:pPr algn="l">
-              <a:lnSpc>
-                <a:spcPct val="105000"/>
-              </a:lnSpc>
-              <a:spcAft>
-                <a:spcPts val="0"/>
-              </a:spcAft>
-            </a:pPr>
-            <a:r>
-              <a:rPr sz="1050">
-                <a:solidFill>
-                  <a:srgbClr val="DFE9F2"/>
-                </a:solidFill>
-                <a:latin typeface="Consolas"/>
-              </a:rPr>
-              <a:t>v1 = 2048 + (c1 * amp[1]) / 2048;</a:t>
-            </a:r>
-          </a:p>
-          <a:p>
-            <a:pPr algn="l">
-              <a:lnSpc>
-                <a:spcPct val="105000"/>
-              </a:lnSpc>
-              <a:spcAft>
-                <a:spcPts val="0"/>
-              </a:spcAft>
-            </a:pPr>
-            <a:r>
-              <a:rPr sz="1050">
-                <a:solidFill>
-                  <a:srgbClr val="DFE9F2"/>
-                </a:solidFill>
-                <a:latin typeface="Consolas"/>
-              </a:rPr>
-              <a:t> </a:t>
-            </a:r>
-          </a:p>
-          <a:p>
-            <a:pPr algn="l">
-              <a:lnSpc>
-                <a:spcPct val="105000"/>
-              </a:lnSpc>
-              <a:spcAft>
-                <a:spcPts val="0"/>
-              </a:spcAft>
-            </a:pPr>
-            <a:r>
-              <a:rPr sz="1050">
-                <a:solidFill>
-                  <a:srgbClr val="DFE9F2"/>
-                </a:solidFill>
-                <a:latin typeface="Consolas"/>
-              </a:rPr>
-              <a:t>HAL_DAC_SetValue(&amp;hdac,DAC_CHANNEL_1,...,v0);</a:t>
-            </a:r>
-          </a:p>
-          <a:p>
-            <a:pPr algn="l">
-              <a:lnSpc>
-                <a:spcPct val="105000"/>
-              </a:lnSpc>
-              <a:spcAft>
-                <a:spcPts val="0"/>
-              </a:spcAft>
-            </a:pPr>
-            <a:r>
-              <a:rPr sz="1050">
-                <a:solidFill>
-                  <a:srgbClr val="DFE9F2"/>
-                </a:solidFill>
-                <a:latin typeface="Consolas"/>
-              </a:rPr>
-              <a:t>HAL_DAC_SetValue(&amp;hdac,DAC_CHANNEL_2,...,v1);</a:t>
+              <a:t>(&amp;hdac,DAC_CHANNEL_2,...,v1);</a:t>
             </a:r>
           </a:p>
         </p:txBody>
@@ -7531,7 +8609,7 @@
         </p:nvSpPr>
         <p:spPr>
           <a:xfrm>
-            <a:off x="502920" y="310896"/>
+            <a:off x="502920" y="365760"/>
             <a:ext cx="10972800" cy="320040"/>
           </a:xfrm>
           <a:prstGeom prst="rect">
@@ -7547,13 +8625,13 @@
           <a:p>
             <a:pPr algn="l"/>
             <a:r>
-              <a:rPr sz="1200" b="1" i="0">
+              <a:rPr sz="1250" b="1">
                 <a:solidFill>
                   <a:srgbClr val="3AD1E0"/>
                 </a:solidFill>
                 <a:latin typeface="Calibri"/>
               </a:rPr>
-              <a:t>PROYECTO CERO · MEDICIONES REALES</a:t>
+              <a:t>PROYECTO CERO · GENERADOR DDS</a:t>
             </a:r>
           </a:p>
         </p:txBody>
@@ -7566,7 +8644,7 @@
         </p:nvSpPr>
         <p:spPr>
           <a:xfrm>
-            <a:off x="457200" y="603504"/>
+            <a:off x="457200" y="676656"/>
             <a:ext cx="11247120" cy="548640"/>
           </a:xfrm>
           <a:prstGeom prst="rect">
@@ -7582,13 +8660,13 @@
           <a:p>
             <a:pPr algn="l"/>
             <a:r>
-              <a:rPr sz="2700" b="1" i="0">
+              <a:rPr sz="2800" b="1">
                 <a:solidFill>
                   <a:srgbClr val="EAF1F8"/>
                 </a:solidFill>
                 <a:latin typeface="Calibri"/>
               </a:rPr>
-              <a:t>Barrido de frecuencia — un canal</a:t>
+              <a:t>Esquema en bloques del circuito implementado</a:t>
             </a:r>
           </a:p>
         </p:txBody>
@@ -7601,8 +8679,8 @@
         </p:nvSpPr>
         <p:spPr>
           <a:xfrm>
-            <a:off x="502920" y="1170432"/>
-            <a:ext cx="11155680" cy="365760"/>
+            <a:off x="502920" y="1280160"/>
+            <a:ext cx="11155680" cy="411480"/>
           </a:xfrm>
           <a:prstGeom prst="rect">
             <a:avLst/>
@@ -7617,20 +8695,67 @@
           <a:p>
             <a:pPr algn="l"/>
             <a:r>
-              <a:rPr sz="1300" b="0" i="0">
+              <a:rPr sz="1350" b="0">
                 <a:solidFill>
                   <a:srgbClr val="9DB2C7"/>
                 </a:solidFill>
                 <a:latin typeface="Calibri"/>
               </a:rPr>
-              <a:t>Misma configuración (fs = 48 kHz), cambiando solo la frecuencia por comando. Todas directas del osciloscopio (sin filtro).</a:t>
-            </a:r>
+              <a:t>La PC envía comandos por UART; el STM32F446 genera las señales con su DAC (0–3.3 V); se observan en el osciloscopio.</a:t>
+            </a:r>
+          </a:p>
+        </p:txBody>
+      </p:sp>
+      <p:sp>
+        <p:nvSpPr>
+          <p:cNvPr id="7" name="Rounded Rectangle 6"/>
+          <p:cNvSpPr/>
+          <p:nvPr/>
+        </p:nvSpPr>
+        <p:spPr>
+          <a:xfrm>
+            <a:off x="1990191" y="2020824"/>
+            <a:ext cx="8211311" cy="3574063"/>
+          </a:xfrm>
+          <a:prstGeom prst="roundRect">
+            <a:avLst/>
+          </a:prstGeom>
+          <a:solidFill>
+            <a:srgbClr val="FFFFFF"/>
+          </a:solidFill>
+          <a:ln w="27940">
+            <a:solidFill>
+              <a:srgbClr val="3AD1E0"/>
+            </a:solidFill>
+          </a:ln>
+          <a:effectLst/>
+        </p:spPr>
+        <p:style>
+          <a:lnRef idx="1">
+            <a:schemeClr val="accent1"/>
+          </a:lnRef>
+          <a:fillRef idx="3">
+            <a:schemeClr val="accent1"/>
+          </a:fillRef>
+          <a:effectRef idx="2">
+            <a:schemeClr val="accent1"/>
+          </a:effectRef>
+          <a:fontRef idx="minor">
+            <a:schemeClr val="lt1"/>
+          </a:fontRef>
+        </p:style>
+        <p:txBody>
+          <a:bodyPr rtlCol="0" anchor="ctr"/>
+          <a:lstStyle/>
+          <a:p>
+            <a:pPr algn="ctr"/>
+            <a:endParaRPr/>
           </a:p>
         </p:txBody>
       </p:sp>
       <p:pic>
         <p:nvPicPr>
-          <p:cNvPr id="7" name="Picture 6" descr="g1000.png"/>
+          <p:cNvPr id="8" name="Picture 7" descr="diag_img.png"/>
           <p:cNvPicPr>
             <a:picLocks noChangeAspect="1"/>
           </p:cNvPicPr>
@@ -7644,151 +8769,30 @@
         </p:blipFill>
         <p:spPr>
           <a:xfrm>
-            <a:off x="365760" y="1627632"/>
-            <a:ext cx="3822191" cy="1760220"/>
+            <a:off x="2210829" y="2194384"/>
+            <a:ext cx="7739861" cy="3228183"/>
           </a:xfrm>
           <a:prstGeom prst="rect">
             <a:avLst/>
           </a:prstGeom>
-          <a:ln w="12700">
-            <a:solidFill>
-              <a:srgbClr val="3AD1E0"/>
-            </a:solidFill>
-          </a:ln>
         </p:spPr>
       </p:pic>
-      <p:pic>
-        <p:nvPicPr>
-          <p:cNvPr id="8" name="Picture 7" descr="g2000.png"/>
-          <p:cNvPicPr>
-            <a:picLocks noChangeAspect="1"/>
-          </p:cNvPicPr>
-          <p:nvPr/>
-        </p:nvPicPr>
-        <p:blipFill>
-          <a:blip r:embed="rId3"/>
-          <a:stretch>
-            <a:fillRect/>
-          </a:stretch>
-        </p:blipFill>
-        <p:spPr>
-          <a:xfrm>
-            <a:off x="4224528" y="1627632"/>
-            <a:ext cx="3822191" cy="1760220"/>
-          </a:xfrm>
-          <a:prstGeom prst="rect">
-            <a:avLst/>
-          </a:prstGeom>
-          <a:ln w="12700">
-            <a:solidFill>
-              <a:srgbClr val="3AD1E0"/>
-            </a:solidFill>
-          </a:ln>
-        </p:spPr>
-      </p:pic>
-      <p:pic>
-        <p:nvPicPr>
-          <p:cNvPr id="9" name="Picture 8" descr="g3000.png"/>
-          <p:cNvPicPr>
-            <a:picLocks noChangeAspect="1"/>
-          </p:cNvPicPr>
-          <p:nvPr/>
-        </p:nvPicPr>
-        <p:blipFill>
-          <a:blip r:embed="rId4"/>
-          <a:stretch>
-            <a:fillRect/>
-          </a:stretch>
-        </p:blipFill>
-        <p:spPr>
-          <a:xfrm>
-            <a:off x="8083296" y="1627632"/>
-            <a:ext cx="3822191" cy="1760220"/>
-          </a:xfrm>
-          <a:prstGeom prst="rect">
-            <a:avLst/>
-          </a:prstGeom>
-          <a:ln w="12700">
-            <a:solidFill>
-              <a:srgbClr val="3AD1E0"/>
-            </a:solidFill>
-          </a:ln>
-        </p:spPr>
-      </p:pic>
-      <p:pic>
-        <p:nvPicPr>
-          <p:cNvPr id="10" name="Picture 9" descr="g4000.png"/>
-          <p:cNvPicPr>
-            <a:picLocks noChangeAspect="1"/>
-          </p:cNvPicPr>
-          <p:nvPr/>
-        </p:nvPicPr>
-        <p:blipFill>
-          <a:blip r:embed="rId5"/>
-          <a:stretch>
-            <a:fillRect/>
-          </a:stretch>
-        </p:blipFill>
-        <p:spPr>
-          <a:xfrm>
-            <a:off x="365760" y="3968496"/>
-            <a:ext cx="3822191" cy="1760220"/>
-          </a:xfrm>
-          <a:prstGeom prst="rect">
-            <a:avLst/>
-          </a:prstGeom>
-          <a:ln w="12700">
-            <a:solidFill>
-              <a:srgbClr val="3AD1E0"/>
-            </a:solidFill>
-          </a:ln>
-        </p:spPr>
-      </p:pic>
-      <p:pic>
-        <p:nvPicPr>
-          <p:cNvPr id="11" name="Picture 10" descr="g5000.png"/>
-          <p:cNvPicPr>
-            <a:picLocks noChangeAspect="1"/>
-          </p:cNvPicPr>
-          <p:nvPr/>
-        </p:nvPicPr>
-        <p:blipFill>
-          <a:blip r:embed="rId6"/>
-          <a:stretch>
-            <a:fillRect/>
-          </a:stretch>
-        </p:blipFill>
-        <p:spPr>
-          <a:xfrm>
-            <a:off x="4224528" y="3968496"/>
-            <a:ext cx="3822191" cy="1760220"/>
-          </a:xfrm>
-          <a:prstGeom prst="rect">
-            <a:avLst/>
-          </a:prstGeom>
-          <a:ln w="12700">
-            <a:solidFill>
-              <a:srgbClr val="3AD1E0"/>
-            </a:solidFill>
-          </a:ln>
-        </p:spPr>
-      </p:pic>
-      <p:sp>
-        <p:nvSpPr>
-          <p:cNvPr id="12" name="Rounded Rectangle 11"/>
+      <p:sp>
+        <p:nvSpPr>
+          <p:cNvPr id="9" name="Rounded Rectangle 8"/>
           <p:cNvSpPr/>
           <p:nvPr/>
         </p:nvSpPr>
         <p:spPr>
           <a:xfrm>
-            <a:off x="8083296" y="3968496"/>
-            <a:ext cx="3822191" cy="1783080"/>
+            <a:off x="1496415" y="6042943"/>
+            <a:ext cx="2426817" cy="402336"/>
           </a:xfrm>
           <a:prstGeom prst="roundRect">
             <a:avLst/>
           </a:prstGeom>
           <a:solidFill>
-            <a:srgbClr val="16273D"/>
+            <a:srgbClr val="1C304C"/>
           </a:solidFill>
           <a:ln>
             <a:noFill/>
@@ -7820,14 +8824,14 @@
       </p:sp>
       <p:sp>
         <p:nvSpPr>
-          <p:cNvPr id="13" name="TextBox 12"/>
+          <p:cNvPr id="10" name="TextBox 9"/>
           <p:cNvSpPr txBox="1"/>
           <p:nvPr/>
         </p:nvSpPr>
         <p:spPr>
           <a:xfrm>
-            <a:off x="8266175" y="4096511"/>
-            <a:ext cx="3456432" cy="365760"/>
+            <a:off x="1496415" y="6116095"/>
+            <a:ext cx="2426817" cy="274320"/>
           </a:xfrm>
           <a:prstGeom prst="rect">
             <a:avLst/>
@@ -7840,29 +8844,74 @@
           </a:bodyPr>
           <a:lstStyle/>
           <a:p>
-            <a:pPr algn="l"/>
-            <a:r>
-              <a:rPr sz="1350" b="1" i="0">
+            <a:pPr algn="ctr"/>
+            <a:r>
+              <a:rPr sz="1150" b="1">
                 <a:solidFill>
                   <a:srgbClr val="3AD1E0"/>
                 </a:solidFill>
                 <a:latin typeface="Calibri"/>
               </a:rPr>
-              <a:t>¿Qué se ve?</a:t>
-            </a:r>
-          </a:p>
-        </p:txBody>
-      </p:sp>
-      <p:sp>
-        <p:nvSpPr>
-          <p:cNvPr id="14" name="TextBox 13"/>
+              <a:t>PC  →  comandos (UART)</a:t>
+            </a:r>
+          </a:p>
+        </p:txBody>
+      </p:sp>
+      <p:sp>
+        <p:nvSpPr>
+          <p:cNvPr id="11" name="Rounded Rectangle 10"/>
+          <p:cNvSpPr/>
+          <p:nvPr/>
+        </p:nvSpPr>
+        <p:spPr>
+          <a:xfrm>
+            <a:off x="4197553" y="6042943"/>
+            <a:ext cx="2524658" cy="402336"/>
+          </a:xfrm>
+          <a:prstGeom prst="roundRect">
+            <a:avLst/>
+          </a:prstGeom>
+          <a:solidFill>
+            <a:srgbClr val="1C304C"/>
+          </a:solidFill>
+          <a:ln>
+            <a:noFill/>
+          </a:ln>
+          <a:effectLst/>
+        </p:spPr>
+        <p:style>
+          <a:lnRef idx="1">
+            <a:schemeClr val="accent1"/>
+          </a:lnRef>
+          <a:fillRef idx="3">
+            <a:schemeClr val="accent1"/>
+          </a:fillRef>
+          <a:effectRef idx="2">
+            <a:schemeClr val="accent1"/>
+          </a:effectRef>
+          <a:fontRef idx="minor">
+            <a:schemeClr val="lt1"/>
+          </a:fontRef>
+        </p:style>
+        <p:txBody>
+          <a:bodyPr rtlCol="0" anchor="ctr"/>
+          <a:lstStyle/>
+          <a:p>
+            <a:pPr algn="ctr"/>
+            <a:endParaRPr/>
+          </a:p>
+        </p:txBody>
+      </p:sp>
+      <p:sp>
+        <p:nvSpPr>
+          <p:cNvPr id="12" name="TextBox 11"/>
           <p:cNvSpPr txBox="1"/>
           <p:nvPr/>
         </p:nvSpPr>
         <p:spPr>
           <a:xfrm>
-            <a:off x="8266175" y="4498848"/>
-            <a:ext cx="3456432" cy="1188720"/>
+            <a:off x="4197553" y="6116095"/>
+            <a:ext cx="2524658" cy="274320"/>
           </a:xfrm>
           <a:prstGeom prst="rect">
             <a:avLst/>
@@ -7875,63 +8924,95 @@
           </a:bodyPr>
           <a:lstStyle/>
           <a:p>
-            <a:pPr algn="l"/>
-            <a:r>
-              <a:rPr sz="1200" b="0" i="0">
-                <a:solidFill>
-                  <a:srgbClr val="EAF1F8"/>
+            <a:pPr algn="ctr"/>
+            <a:r>
+              <a:rPr sz="1150" b="1">
+                <a:solidFill>
+                  <a:srgbClr val="3AD1E0"/>
                 </a:solidFill>
                 <a:latin typeface="Calibri"/>
               </a:rPr>
-              <a:t>A más frecuencia, menos</a:t>
-            </a:r>
-          </a:p>
-          <a:p>
-            <a:pPr algn="l"/>
-            <a:r>
-              <a:rPr sz="1200" b="0" i="0">
-                <a:solidFill>
-                  <a:srgbClr val="EAF1F8"/>
+              <a:t>STM32F446  →  DDS + DAC</a:t>
+            </a:r>
+          </a:p>
+        </p:txBody>
+      </p:sp>
+      <p:sp>
+        <p:nvSpPr>
+          <p:cNvPr id="13" name="Rounded Rectangle 12"/>
+          <p:cNvSpPr/>
+          <p:nvPr/>
+        </p:nvSpPr>
+        <p:spPr>
+          <a:xfrm>
+            <a:off x="6996531" y="6042943"/>
+            <a:ext cx="3698748" cy="402336"/>
+          </a:xfrm>
+          <a:prstGeom prst="roundRect">
+            <a:avLst/>
+          </a:prstGeom>
+          <a:solidFill>
+            <a:srgbClr val="1C304C"/>
+          </a:solidFill>
+          <a:ln>
+            <a:noFill/>
+          </a:ln>
+          <a:effectLst/>
+        </p:spPr>
+        <p:style>
+          <a:lnRef idx="1">
+            <a:schemeClr val="accent1"/>
+          </a:lnRef>
+          <a:fillRef idx="3">
+            <a:schemeClr val="accent1"/>
+          </a:fillRef>
+          <a:effectRef idx="2">
+            <a:schemeClr val="accent1"/>
+          </a:effectRef>
+          <a:fontRef idx="minor">
+            <a:schemeClr val="lt1"/>
+          </a:fontRef>
+        </p:style>
+        <p:txBody>
+          <a:bodyPr rtlCol="0" anchor="ctr"/>
+          <a:lstStyle/>
+          <a:p>
+            <a:pPr algn="ctr"/>
+            <a:endParaRPr/>
+          </a:p>
+        </p:txBody>
+      </p:sp>
+      <p:sp>
+        <p:nvSpPr>
+          <p:cNvPr id="14" name="TextBox 13"/>
+          <p:cNvSpPr txBox="1"/>
+          <p:nvPr/>
+        </p:nvSpPr>
+        <p:spPr>
+          <a:xfrm>
+            <a:off x="6996531" y="6116095"/>
+            <a:ext cx="3698748" cy="274320"/>
+          </a:xfrm>
+          <a:prstGeom prst="rect">
+            <a:avLst/>
+          </a:prstGeom>
+          <a:noFill/>
+        </p:spPr>
+        <p:txBody>
+          <a:bodyPr wrap="square" lIns="45720" tIns="0" rIns="45720" bIns="0" anchor="t">
+            <a:spAutoFit/>
+          </a:bodyPr>
+          <a:lstStyle/>
+          <a:p>
+            <a:pPr algn="ctr"/>
+            <a:r>
+              <a:rPr sz="1150" b="1">
+                <a:solidFill>
+                  <a:srgbClr val="3AD1E0"/>
                 </a:solidFill>
                 <a:latin typeface="Calibri"/>
               </a:rPr>
-              <a:t>muestras por ciclo (fs/fout):</a:t>
-            </a:r>
-          </a:p>
-          <a:p>
-            <a:pPr algn="l"/>
-            <a:r>
-              <a:rPr sz="1200" b="0" i="0">
-                <a:solidFill>
-                  <a:srgbClr val="EAF1F8"/>
-                </a:solidFill>
-                <a:latin typeface="Calibri"/>
-              </a:rPr>
-              <a:t>1 kHz → 48   ·   5 kHz → 9</a:t>
-            </a:r>
-          </a:p>
-          <a:p>
-            <a:pPr algn="l"/>
-            <a:r>
-              <a:rPr sz="1200" b="0" i="0">
-                <a:solidFill>
-                  <a:srgbClr val="EAF1F8"/>
-                </a:solidFill>
-                <a:latin typeface="Calibri"/>
-              </a:rPr>
-              <a:t>Por eso el escalonado crece</a:t>
-            </a:r>
-          </a:p>
-          <a:p>
-            <a:pPr algn="l"/>
-            <a:r>
-              <a:rPr sz="1200" b="0" i="0">
-                <a:solidFill>
-                  <a:srgbClr val="EAF1F8"/>
-                </a:solidFill>
-                <a:latin typeface="Calibri"/>
-              </a:rPr>
-              <a:t>con la frecuencia.</a:t>
+              <a:t>Osciloscopio  →  medición (0–3.3 V)</a:t>
             </a:r>
           </a:p>
         </p:txBody>
@@ -8116,7 +9197,7 @@
                 </a:solidFill>
                 <a:latin typeface="Calibri"/>
               </a:rPr>
-              <a:t>Dos canales a la vez, independientes</a:t>
+              <a:t>Barrido de frecuencia — un canal</a:t>
             </a:r>
           </a:p>
         </p:txBody>
@@ -8151,14 +9232,14 @@
                 </a:solidFill>
                 <a:latin typeface="Calibri"/>
               </a:rPr>
-              <a:t>Salida simultánea por PA4 y PA5, cada una con su propia frecuencia y amplitud. Captura directa del osciloscopio.</a:t>
+              <a:t>Misma configuración (fs = 48 kHz), cambiando solo la frecuencia por comando. Todas directas del osciloscopio (sin filtro).</a:t>
             </a:r>
           </a:p>
         </p:txBody>
       </p:sp>
       <p:pic>
         <p:nvPicPr>
-          <p:cNvPr id="7" name="Picture 6" descr="g_dual.png"/>
+          <p:cNvPr id="7" name="Picture 6" descr="g1000.png"/>
           <p:cNvPicPr>
             <a:picLocks noChangeAspect="1"/>
           </p:cNvPicPr>
@@ -8172,8 +9253,8 @@
         </p:blipFill>
         <p:spPr>
           <a:xfrm>
-            <a:off x="822960" y="1691640"/>
-            <a:ext cx="10515600" cy="4206240"/>
+            <a:off x="365760" y="1627632"/>
+            <a:ext cx="3822191" cy="1760220"/>
           </a:xfrm>
           <a:prstGeom prst="rect">
             <a:avLst/>
@@ -8185,22 +9266,138 @@
           </a:ln>
         </p:spPr>
       </p:pic>
-      <p:sp>
-        <p:nvSpPr>
-          <p:cNvPr id="8" name="Rounded Rectangle 7"/>
+      <p:pic>
+        <p:nvPicPr>
+          <p:cNvPr id="8" name="Picture 7" descr="g2000.png"/>
+          <p:cNvPicPr>
+            <a:picLocks noChangeAspect="1"/>
+          </p:cNvPicPr>
+          <p:nvPr/>
+        </p:nvPicPr>
+        <p:blipFill>
+          <a:blip r:embed="rId3"/>
+          <a:stretch>
+            <a:fillRect/>
+          </a:stretch>
+        </p:blipFill>
+        <p:spPr>
+          <a:xfrm>
+            <a:off x="4224528" y="1627632"/>
+            <a:ext cx="3822191" cy="1760220"/>
+          </a:xfrm>
+          <a:prstGeom prst="rect">
+            <a:avLst/>
+          </a:prstGeom>
+          <a:ln w="12700">
+            <a:solidFill>
+              <a:srgbClr val="3AD1E0"/>
+            </a:solidFill>
+          </a:ln>
+        </p:spPr>
+      </p:pic>
+      <p:pic>
+        <p:nvPicPr>
+          <p:cNvPr id="9" name="Picture 8" descr="g3000.png"/>
+          <p:cNvPicPr>
+            <a:picLocks noChangeAspect="1"/>
+          </p:cNvPicPr>
+          <p:nvPr/>
+        </p:nvPicPr>
+        <p:blipFill>
+          <a:blip r:embed="rId4"/>
+          <a:stretch>
+            <a:fillRect/>
+          </a:stretch>
+        </p:blipFill>
+        <p:spPr>
+          <a:xfrm>
+            <a:off x="8083296" y="1627632"/>
+            <a:ext cx="3822191" cy="1760220"/>
+          </a:xfrm>
+          <a:prstGeom prst="rect">
+            <a:avLst/>
+          </a:prstGeom>
+          <a:ln w="12700">
+            <a:solidFill>
+              <a:srgbClr val="3AD1E0"/>
+            </a:solidFill>
+          </a:ln>
+        </p:spPr>
+      </p:pic>
+      <p:pic>
+        <p:nvPicPr>
+          <p:cNvPr id="10" name="Picture 9" descr="g4000.png"/>
+          <p:cNvPicPr>
+            <a:picLocks noChangeAspect="1"/>
+          </p:cNvPicPr>
+          <p:nvPr/>
+        </p:nvPicPr>
+        <p:blipFill>
+          <a:blip r:embed="rId5"/>
+          <a:stretch>
+            <a:fillRect/>
+          </a:stretch>
+        </p:blipFill>
+        <p:spPr>
+          <a:xfrm>
+            <a:off x="365760" y="3968496"/>
+            <a:ext cx="3822191" cy="1760220"/>
+          </a:xfrm>
+          <a:prstGeom prst="rect">
+            <a:avLst/>
+          </a:prstGeom>
+          <a:ln w="12700">
+            <a:solidFill>
+              <a:srgbClr val="3AD1E0"/>
+            </a:solidFill>
+          </a:ln>
+        </p:spPr>
+      </p:pic>
+      <p:pic>
+        <p:nvPicPr>
+          <p:cNvPr id="11" name="Picture 10" descr="g5000.png"/>
+          <p:cNvPicPr>
+            <a:picLocks noChangeAspect="1"/>
+          </p:cNvPicPr>
+          <p:nvPr/>
+        </p:nvPicPr>
+        <p:blipFill>
+          <a:blip r:embed="rId6"/>
+          <a:stretch>
+            <a:fillRect/>
+          </a:stretch>
+        </p:blipFill>
+        <p:spPr>
+          <a:xfrm>
+            <a:off x="4224528" y="3968496"/>
+            <a:ext cx="3822191" cy="1760220"/>
+          </a:xfrm>
+          <a:prstGeom prst="rect">
+            <a:avLst/>
+          </a:prstGeom>
+          <a:ln w="12700">
+            <a:solidFill>
+              <a:srgbClr val="3AD1E0"/>
+            </a:solidFill>
+          </a:ln>
+        </p:spPr>
+      </p:pic>
+      <p:sp>
+        <p:nvSpPr>
+          <p:cNvPr id="12" name="Rounded Rectangle 11"/>
           <p:cNvSpPr/>
           <p:nvPr/>
         </p:nvSpPr>
         <p:spPr>
           <a:xfrm>
-            <a:off x="822960" y="5806440"/>
-            <a:ext cx="10515600" cy="685800"/>
+            <a:off x="8083296" y="3968496"/>
+            <a:ext cx="3822191" cy="1783080"/>
           </a:xfrm>
           <a:prstGeom prst="roundRect">
             <a:avLst/>
           </a:prstGeom>
           <a:solidFill>
-            <a:srgbClr val="1C304C"/>
+            <a:srgbClr val="16273D"/>
           </a:solidFill>
           <a:ln>
             <a:noFill/>
@@ -8232,14 +9429,14 @@
       </p:sp>
       <p:sp>
         <p:nvSpPr>
-          <p:cNvPr id="9" name="TextBox 8"/>
+          <p:cNvPr id="13" name="TextBox 12"/>
           <p:cNvSpPr txBox="1"/>
           <p:nvPr/>
         </p:nvSpPr>
         <p:spPr>
           <a:xfrm>
-            <a:off x="1051560" y="5897880"/>
-            <a:ext cx="10058400" cy="502920"/>
+            <a:off x="8266175" y="4096511"/>
+            <a:ext cx="3456432" cy="365760"/>
           </a:xfrm>
           <a:prstGeom prst="rect">
             <a:avLst/>
@@ -8247,20 +9444,103 @@
           <a:noFill/>
         </p:spPr>
         <p:txBody>
-          <a:bodyPr wrap="square" lIns="45720" tIns="0" rIns="45720" bIns="0" anchor="ctr">
+          <a:bodyPr wrap="square" lIns="45720" tIns="0" rIns="45720" bIns="0" anchor="t">
             <a:spAutoFit/>
           </a:bodyPr>
           <a:lstStyle/>
           <a:p>
             <a:pPr algn="l"/>
             <a:r>
+              <a:rPr sz="1350" b="1" i="0">
+                <a:solidFill>
+                  <a:srgbClr val="3AD1E0"/>
+                </a:solidFill>
+                <a:latin typeface="Calibri"/>
+              </a:rPr>
+              <a:t>¿Qué se ve?</a:t>
+            </a:r>
+          </a:p>
+        </p:txBody>
+      </p:sp>
+      <p:sp>
+        <p:nvSpPr>
+          <p:cNvPr id="14" name="TextBox 13"/>
+          <p:cNvSpPr txBox="1"/>
+          <p:nvPr/>
+        </p:nvSpPr>
+        <p:spPr>
+          <a:xfrm>
+            <a:off x="8266175" y="4498848"/>
+            <a:ext cx="3456432" cy="1188720"/>
+          </a:xfrm>
+          <a:prstGeom prst="rect">
+            <a:avLst/>
+          </a:prstGeom>
+          <a:noFill/>
+        </p:spPr>
+        <p:txBody>
+          <a:bodyPr wrap="square" lIns="45720" tIns="0" rIns="45720" bIns="0" anchor="t">
+            <a:spAutoFit/>
+          </a:bodyPr>
+          <a:lstStyle/>
+          <a:p>
+            <a:pPr algn="l"/>
+            <a:r>
               <a:rPr sz="1200" b="0" i="0">
                 <a:solidFill>
-                  <a:srgbClr val="9DB2C7"/>
+                  <a:srgbClr val="EAF1F8"/>
                 </a:solidFill>
                 <a:latin typeface="Calibri"/>
               </a:rPr>
-              <a:t>Los dos osciladores DDS corren en la misma interrupción (una sola tabla, un solo timer): acá ≈ 306 Hz y ≈ 100 Hz al mismo tiempo, con amplitudes distintas. Comparten fs = 48 kHz.</a:t>
+              <a:t>A más frecuencia, menos</a:t>
+            </a:r>
+          </a:p>
+          <a:p>
+            <a:pPr algn="l"/>
+            <a:r>
+              <a:rPr sz="1200" b="0" i="0">
+                <a:solidFill>
+                  <a:srgbClr val="EAF1F8"/>
+                </a:solidFill>
+                <a:latin typeface="Calibri"/>
+              </a:rPr>
+              <a:t>muestras por ciclo (fs/fout):</a:t>
+            </a:r>
+          </a:p>
+          <a:p>
+            <a:pPr algn="l"/>
+            <a:r>
+              <a:rPr sz="1200" b="0" i="0">
+                <a:solidFill>
+                  <a:srgbClr val="EAF1F8"/>
+                </a:solidFill>
+                <a:latin typeface="Calibri"/>
+              </a:rPr>
+              <a:t>1 kHz → 48   ·   5 kHz → 9</a:t>
+            </a:r>
+          </a:p>
+          <a:p>
+            <a:pPr algn="l"/>
+            <a:r>
+              <a:rPr sz="1200" b="0" i="0">
+                <a:solidFill>
+                  <a:srgbClr val="EAF1F8"/>
+                </a:solidFill>
+                <a:latin typeface="Calibri"/>
+              </a:rPr>
+              <a:t>Por eso el escalonado crece</a:t>
+            </a:r>
+          </a:p>
+          <a:p>
+            <a:pPr algn="l"/>
+            <a:r>
+              <a:rPr sz="1200" b="0" i="0">
+                <a:solidFill>
+                  <a:srgbClr val="EAF1F8"/>
+                </a:solidFill>
+                <a:latin typeface="Calibri"/>
+              </a:rPr>
+              <a:t>con la frecuencia.</a:t>
             </a:r>
           </a:p>
         </p:txBody>
@@ -8304,6 +9584,335 @@
           <a:prstGeom prst="rect">
             <a:avLst/>
           </a:prstGeom>
+          <a:solidFill>
+            <a:srgbClr val="0E1B2E"/>
+          </a:solidFill>
+          <a:ln>
+            <a:noFill/>
+          </a:ln>
+          <a:effectLst/>
+        </p:spPr>
+        <p:style>
+          <a:lnRef idx="1">
+            <a:schemeClr val="accent1"/>
+          </a:lnRef>
+          <a:fillRef idx="3">
+            <a:schemeClr val="accent1"/>
+          </a:fillRef>
+          <a:effectRef idx="2">
+            <a:schemeClr val="accent1"/>
+          </a:effectRef>
+          <a:fontRef idx="minor">
+            <a:schemeClr val="lt1"/>
+          </a:fontRef>
+        </p:style>
+        <p:txBody>
+          <a:bodyPr rtlCol="0" anchor="ctr"/>
+          <a:lstStyle/>
+          <a:p>
+            <a:pPr algn="ctr"/>
+            <a:endParaRPr/>
+          </a:p>
+        </p:txBody>
+      </p:sp>
+      <p:sp>
+        <p:nvSpPr>
+          <p:cNvPr id="3" name="Rectangle 2"/>
+          <p:cNvSpPr/>
+          <p:nvPr/>
+        </p:nvSpPr>
+        <p:spPr>
+          <a:xfrm>
+            <a:off x="0" y="0"/>
+            <a:ext cx="118872" cy="6858000"/>
+          </a:xfrm>
+          <a:prstGeom prst="rect">
+            <a:avLst/>
+          </a:prstGeom>
+          <a:solidFill>
+            <a:srgbClr val="3AD1E0"/>
+          </a:solidFill>
+          <a:ln>
+            <a:noFill/>
+          </a:ln>
+          <a:effectLst/>
+        </p:spPr>
+        <p:style>
+          <a:lnRef idx="1">
+            <a:schemeClr val="accent1"/>
+          </a:lnRef>
+          <a:fillRef idx="3">
+            <a:schemeClr val="accent1"/>
+          </a:fillRef>
+          <a:effectRef idx="2">
+            <a:schemeClr val="accent1"/>
+          </a:effectRef>
+          <a:fontRef idx="minor">
+            <a:schemeClr val="lt1"/>
+          </a:fontRef>
+        </p:style>
+        <p:txBody>
+          <a:bodyPr rtlCol="0" anchor="ctr"/>
+          <a:lstStyle/>
+          <a:p>
+            <a:pPr algn="ctr"/>
+            <a:endParaRPr/>
+          </a:p>
+        </p:txBody>
+      </p:sp>
+      <p:sp>
+        <p:nvSpPr>
+          <p:cNvPr id="4" name="TextBox 3"/>
+          <p:cNvSpPr txBox="1"/>
+          <p:nvPr/>
+        </p:nvSpPr>
+        <p:spPr>
+          <a:xfrm>
+            <a:off x="502920" y="310896"/>
+            <a:ext cx="10972800" cy="320040"/>
+          </a:xfrm>
+          <a:prstGeom prst="rect">
+            <a:avLst/>
+          </a:prstGeom>
+          <a:noFill/>
+        </p:spPr>
+        <p:txBody>
+          <a:bodyPr wrap="square" lIns="45720" tIns="0" rIns="45720" bIns="0" anchor="t">
+            <a:spAutoFit/>
+          </a:bodyPr>
+          <a:lstStyle/>
+          <a:p>
+            <a:pPr algn="l"/>
+            <a:r>
+              <a:rPr sz="1200" b="1" i="0">
+                <a:solidFill>
+                  <a:srgbClr val="3AD1E0"/>
+                </a:solidFill>
+                <a:latin typeface="Calibri"/>
+              </a:rPr>
+              <a:t>PROYECTO CERO · MEDICIONES REALES</a:t>
+            </a:r>
+          </a:p>
+        </p:txBody>
+      </p:sp>
+      <p:sp>
+        <p:nvSpPr>
+          <p:cNvPr id="5" name="TextBox 4"/>
+          <p:cNvSpPr txBox="1"/>
+          <p:nvPr/>
+        </p:nvSpPr>
+        <p:spPr>
+          <a:xfrm>
+            <a:off x="457200" y="603504"/>
+            <a:ext cx="11247120" cy="548640"/>
+          </a:xfrm>
+          <a:prstGeom prst="rect">
+            <a:avLst/>
+          </a:prstGeom>
+          <a:noFill/>
+        </p:spPr>
+        <p:txBody>
+          <a:bodyPr wrap="square" lIns="45720" tIns="0" rIns="45720" bIns="0" anchor="t">
+            <a:spAutoFit/>
+          </a:bodyPr>
+          <a:lstStyle/>
+          <a:p>
+            <a:pPr algn="l"/>
+            <a:r>
+              <a:rPr sz="2700" b="1" i="0">
+                <a:solidFill>
+                  <a:srgbClr val="EAF1F8"/>
+                </a:solidFill>
+                <a:latin typeface="Calibri"/>
+              </a:rPr>
+              <a:t>Dos canales a la vez, independientes</a:t>
+            </a:r>
+          </a:p>
+        </p:txBody>
+      </p:sp>
+      <p:sp>
+        <p:nvSpPr>
+          <p:cNvPr id="6" name="TextBox 5"/>
+          <p:cNvSpPr txBox="1"/>
+          <p:nvPr/>
+        </p:nvSpPr>
+        <p:spPr>
+          <a:xfrm>
+            <a:off x="502920" y="1170432"/>
+            <a:ext cx="11155680" cy="365760"/>
+          </a:xfrm>
+          <a:prstGeom prst="rect">
+            <a:avLst/>
+          </a:prstGeom>
+          <a:noFill/>
+        </p:spPr>
+        <p:txBody>
+          <a:bodyPr wrap="square" lIns="45720" tIns="0" rIns="45720" bIns="0" anchor="t">
+            <a:spAutoFit/>
+          </a:bodyPr>
+          <a:lstStyle/>
+          <a:p>
+            <a:pPr algn="l"/>
+            <a:r>
+              <a:rPr sz="1300" b="0" i="0">
+                <a:solidFill>
+                  <a:srgbClr val="9DB2C7"/>
+                </a:solidFill>
+                <a:latin typeface="Calibri"/>
+              </a:rPr>
+              <a:t>Salida simultánea por PA4 y PA5, cada una con su propia frecuencia y amplitud. Captura directa del osciloscopio.</a:t>
+            </a:r>
+          </a:p>
+        </p:txBody>
+      </p:sp>
+      <p:pic>
+        <p:nvPicPr>
+          <p:cNvPr id="7" name="Picture 6" descr="g_dual.png"/>
+          <p:cNvPicPr>
+            <a:picLocks noChangeAspect="1"/>
+          </p:cNvPicPr>
+          <p:nvPr/>
+        </p:nvPicPr>
+        <p:blipFill>
+          <a:blip r:embed="rId2"/>
+          <a:stretch>
+            <a:fillRect/>
+          </a:stretch>
+        </p:blipFill>
+        <p:spPr>
+          <a:xfrm>
+            <a:off x="822960" y="1691640"/>
+            <a:ext cx="10515600" cy="4206240"/>
+          </a:xfrm>
+          <a:prstGeom prst="rect">
+            <a:avLst/>
+          </a:prstGeom>
+          <a:ln w="12700">
+            <a:solidFill>
+              <a:srgbClr val="3AD1E0"/>
+            </a:solidFill>
+          </a:ln>
+        </p:spPr>
+      </p:pic>
+      <p:sp>
+        <p:nvSpPr>
+          <p:cNvPr id="8" name="Rounded Rectangle 7"/>
+          <p:cNvSpPr/>
+          <p:nvPr/>
+        </p:nvSpPr>
+        <p:spPr>
+          <a:xfrm>
+            <a:off x="822960" y="5806440"/>
+            <a:ext cx="10515600" cy="685800"/>
+          </a:xfrm>
+          <a:prstGeom prst="roundRect">
+            <a:avLst/>
+          </a:prstGeom>
+          <a:solidFill>
+            <a:srgbClr val="1C304C"/>
+          </a:solidFill>
+          <a:ln>
+            <a:noFill/>
+          </a:ln>
+          <a:effectLst/>
+        </p:spPr>
+        <p:style>
+          <a:lnRef idx="1">
+            <a:schemeClr val="accent1"/>
+          </a:lnRef>
+          <a:fillRef idx="3">
+            <a:schemeClr val="accent1"/>
+          </a:fillRef>
+          <a:effectRef idx="2">
+            <a:schemeClr val="accent1"/>
+          </a:effectRef>
+          <a:fontRef idx="minor">
+            <a:schemeClr val="lt1"/>
+          </a:fontRef>
+        </p:style>
+        <p:txBody>
+          <a:bodyPr rtlCol="0" anchor="ctr"/>
+          <a:lstStyle/>
+          <a:p>
+            <a:pPr algn="ctr"/>
+            <a:endParaRPr/>
+          </a:p>
+        </p:txBody>
+      </p:sp>
+      <p:sp>
+        <p:nvSpPr>
+          <p:cNvPr id="9" name="TextBox 8"/>
+          <p:cNvSpPr txBox="1"/>
+          <p:nvPr/>
+        </p:nvSpPr>
+        <p:spPr>
+          <a:xfrm>
+            <a:off x="1051560" y="5897880"/>
+            <a:ext cx="10058400" cy="502920"/>
+          </a:xfrm>
+          <a:prstGeom prst="rect">
+            <a:avLst/>
+          </a:prstGeom>
+          <a:noFill/>
+        </p:spPr>
+        <p:txBody>
+          <a:bodyPr wrap="square" lIns="45720" tIns="0" rIns="45720" bIns="0" anchor="ctr">
+            <a:spAutoFit/>
+          </a:bodyPr>
+          <a:lstStyle/>
+          <a:p>
+            <a:pPr algn="l"/>
+            <a:r>
+              <a:rPr sz="1200" b="0" i="0">
+                <a:solidFill>
+                  <a:srgbClr val="9DB2C7"/>
+                </a:solidFill>
+                <a:latin typeface="Calibri"/>
+              </a:rPr>
+              <a:t>Los dos osciladores DDS corren en la misma interrupción (una sola tabla, un solo timer): acá ≈ 306 Hz y ≈ 100 Hz al mismo tiempo, con amplitudes distintas. Comparten fs = 48 kHz.</a:t>
+            </a:r>
+          </a:p>
+        </p:txBody>
+      </p:sp>
+    </p:spTree>
+  </p:cSld>
+  <p:clrMapOvr>
+    <a:masterClrMapping/>
+  </p:clrMapOvr>
+</p:sld>
+</file>
+
+<file path=ppt/slides/slide15.xml><?xml version="1.0" encoding="utf-8"?>
+<p:sld xmlns:a="http://schemas.openxmlformats.org/drawingml/2006/main" xmlns:r="http://schemas.openxmlformats.org/officeDocument/2006/relationships" xmlns:p="http://schemas.openxmlformats.org/presentationml/2006/main">
+  <p:cSld>
+    <p:spTree>
+      <p:nvGrpSpPr>
+        <p:cNvPr id="1" name=""/>
+        <p:cNvGrpSpPr/>
+        <p:nvPr/>
+      </p:nvGrpSpPr>
+      <p:grpSpPr>
+        <a:xfrm>
+          <a:off x="0" y="0"/>
+          <a:ext cx="0" cy="0"/>
+          <a:chOff x="0" y="0"/>
+          <a:chExt cx="0" cy="0"/>
+        </a:xfrm>
+      </p:grpSpPr>
+      <p:sp>
+        <p:nvSpPr>
+          <p:cNvPr id="2" name="Rectangle 1"/>
+          <p:cNvSpPr/>
+          <p:nvPr/>
+        </p:nvSpPr>
+        <p:spPr>
+          <a:xfrm>
+            <a:off x="0" y="0"/>
+            <a:ext cx="12191695" cy="6858000"/>
+          </a:xfrm>
+          <a:prstGeom prst="rect">
+            <a:avLst/>
+          </a:prstGeom>
           <a:gradFill rotWithShape="1">
             <a:gsLst>
               <a:gs pos="0">
@@ -9024,25 +10633,7 @@
                 </a:solidFill>
                 <a:latin typeface="Segoe UI"/>
               </a:rPr>
-              <a:t> con corte </a:t>
-            </a:r>
-            <a:r>
-              <a:rPr sz="1400" b="1" dirty="0" err="1">
-                <a:solidFill>
-                  <a:srgbClr val="E8EEF7"/>
-                </a:solidFill>
-                <a:latin typeface="Segoe UI"/>
-              </a:rPr>
-              <a:t>más</a:t>
-            </a:r>
-            <a:r>
-              <a:rPr sz="1400" b="1" dirty="0">
-                <a:solidFill>
-                  <a:srgbClr val="E8EEF7"/>
-                </a:solidFill>
-                <a:latin typeface="Segoe UI"/>
-              </a:rPr>
-              <a:t> bajo</a:t>
+              <a:t> con corte</a:t>
             </a:r>
             <a:r>
               <a:rPr sz="1400" dirty="0">
@@ -9115,7 +10706,7 @@
               </a:spcAft>
             </a:pPr>
             <a:r>
-              <a:rPr sz="1400" b="1">
+              <a:rPr sz="1400" b="1" dirty="0">
                 <a:solidFill>
                   <a:srgbClr val="22D3EE"/>
                 </a:solidFill>
@@ -10025,13 +11616,76 @@
               </a:lnSpc>
             </a:pPr>
             <a:r>
-              <a:rPr sz="1400" b="1" i="0">
+              <a:rPr sz="1400" b="1" i="0" dirty="0" err="1">
                 <a:solidFill>
                   <a:srgbClr val="22D3EE"/>
                 </a:solidFill>
                 <a:latin typeface="Consolas"/>
               </a:rPr>
-              <a:t>Tabla senoidal  +  acumulador de fase  +  paso (FTW)</a:t>
+              <a:t>Tabla</a:t>
+            </a:r>
+            <a:r>
+              <a:rPr sz="1400" b="1" i="0" dirty="0">
+                <a:solidFill>
+                  <a:srgbClr val="22D3EE"/>
+                </a:solidFill>
+                <a:latin typeface="Consolas"/>
+              </a:rPr>
+              <a:t> </a:t>
+            </a:r>
+            <a:r>
+              <a:rPr sz="1400" b="1" i="0" dirty="0" err="1">
+                <a:solidFill>
+                  <a:srgbClr val="22D3EE"/>
+                </a:solidFill>
+                <a:latin typeface="Consolas"/>
+              </a:rPr>
+              <a:t>senoidal</a:t>
+            </a:r>
+            <a:r>
+              <a:rPr sz="1400" b="1" i="0" dirty="0">
+                <a:solidFill>
+                  <a:srgbClr val="22D3EE"/>
+                </a:solidFill>
+                <a:latin typeface="Consolas"/>
+              </a:rPr>
+              <a:t>  +  </a:t>
+            </a:r>
+            <a:r>
+              <a:rPr sz="1400" b="1" i="0" dirty="0" err="1">
+                <a:solidFill>
+                  <a:srgbClr val="22D3EE"/>
+                </a:solidFill>
+                <a:latin typeface="Consolas"/>
+              </a:rPr>
+              <a:t>acumulador</a:t>
+            </a:r>
+            <a:r>
+              <a:rPr sz="1400" b="1" i="0" dirty="0">
+                <a:solidFill>
+                  <a:srgbClr val="22D3EE"/>
+                </a:solidFill>
+                <a:latin typeface="Consolas"/>
+              </a:rPr>
+              <a:t> de </a:t>
+            </a:r>
+            <a:r>
+              <a:rPr sz="1400" b="1" i="0" dirty="0" err="1">
+                <a:solidFill>
+                  <a:srgbClr val="22D3EE"/>
+                </a:solidFill>
+                <a:latin typeface="Consolas"/>
+              </a:rPr>
+              <a:t>fase</a:t>
+            </a:r>
+            <a:r>
+              <a:rPr sz="1400" b="1" i="0" dirty="0">
+                <a:solidFill>
+                  <a:srgbClr val="22D3EE"/>
+                </a:solidFill>
+                <a:latin typeface="Consolas"/>
+              </a:rPr>
+              <a:t>  +  paso (FTW)</a:t>
             </a:r>
           </a:p>
         </p:txBody>
@@ -11224,7 +12878,7 @@
                     <a:lstStyle/>
                     <a:p>
                       <a:r>
-                        <a:rPr sz="1400" b="1">
+                        <a:rPr sz="1400" b="1" dirty="0">
                           <a:solidFill>
                             <a:srgbClr val="22D3EE"/>
                           </a:solidFill>
@@ -11246,7 +12900,7 @@
                     <a:lstStyle/>
                     <a:p>
                       <a:r>
-                        <a:rPr sz="1400" b="1">
+                        <a:rPr sz="1400" b="1" dirty="0">
                           <a:solidFill>
                             <a:srgbClr val="22D3EE"/>
                           </a:solidFill>
@@ -11268,7 +12922,7 @@
                     <a:lstStyle/>
                     <a:p>
                       <a:r>
-                        <a:rPr sz="1400" b="1">
+                        <a:rPr sz="1400" b="1" dirty="0">
                           <a:solidFill>
                             <a:srgbClr val="34D399"/>
                           </a:solidFill>
@@ -11414,14 +13068,29 @@
                     <a:lstStyle/>
                     <a:p>
                       <a:r>
-                        <a:rPr sz="1200" b="1">
+                        <a:rPr sz="1200" b="1" dirty="0">
                           <a:solidFill>
                             <a:srgbClr val="FBBF24"/>
                           </a:solidFill>
                           <a:latin typeface="Segoe UI"/>
                         </a:rPr>
-                        <a:t>✗  no tiene</a:t>
+                        <a:t>✗  no </a:t>
                       </a:r>
+                      <a:r>
+                        <a:rPr sz="1200" b="1" dirty="0" err="1">
+                          <a:solidFill>
+                            <a:srgbClr val="FBBF24"/>
+                          </a:solidFill>
+                          <a:latin typeface="Segoe UI"/>
+                        </a:rPr>
+                        <a:t>tiene</a:t>
+                      </a:r>
+                      <a:endParaRPr sz="1200" b="1" dirty="0">
+                        <a:solidFill>
+                          <a:srgbClr val="FBBF24"/>
+                        </a:solidFill>
+                        <a:latin typeface="Segoe UI"/>
+                      </a:endParaRPr>
                     </a:p>
                   </a:txBody>
                   <a:tcPr marL="118872" anchor="ctr">
@@ -11531,7 +13200,7 @@
                     <a:lstStyle/>
                     <a:p>
                       <a:r>
-                        <a:rPr sz="1200">
+                        <a:rPr sz="1200" dirty="0">
                           <a:solidFill>
                             <a:srgbClr val="9AABC4"/>
                           </a:solidFill>
@@ -11699,7 +13368,7 @@
                     <a:lstStyle/>
                     <a:p>
                       <a:r>
-                        <a:rPr sz="1200">
+                        <a:rPr sz="1200" dirty="0">
                           <a:solidFill>
                             <a:srgbClr val="9AABC4"/>
                           </a:solidFill>
@@ -11721,7 +13390,7 @@
                     <a:lstStyle/>
                     <a:p>
                       <a:r>
-                        <a:rPr sz="1200">
+                        <a:rPr sz="1200" dirty="0">
                           <a:solidFill>
                             <a:srgbClr val="9AABC4"/>
                           </a:solidFill>
@@ -11743,7 +13412,7 @@
                     <a:lstStyle/>
                     <a:p>
                       <a:r>
-                        <a:rPr sz="1250" b="1">
+                        <a:rPr sz="1250" b="1" dirty="0">
                           <a:solidFill>
                             <a:srgbClr val="34D399"/>
                           </a:solidFill>
@@ -11794,14 +13463,29 @@
                     <a:lstStyle/>
                     <a:p>
                       <a:r>
-                        <a:rPr sz="1200" b="0" i="1">
+                        <a:rPr sz="1200" b="0" i="1" dirty="0">
                           <a:solidFill>
                             <a:srgbClr val="9AABC4"/>
                           </a:solidFill>
                           <a:latin typeface="Segoe UI"/>
                         </a:rPr>
-                        <a:t>Sin DAC → descartado</a:t>
+                        <a:t>Sin DAC → </a:t>
                       </a:r>
+                      <a:r>
+                        <a:rPr sz="1200" b="0" i="1" dirty="0" err="1">
+                          <a:solidFill>
+                            <a:srgbClr val="9AABC4"/>
+                          </a:solidFill>
+                          <a:latin typeface="Segoe UI"/>
+                        </a:rPr>
+                        <a:t>descartado</a:t>
+                      </a:r>
+                      <a:endParaRPr sz="1200" b="0" i="1" dirty="0">
+                        <a:solidFill>
+                          <a:srgbClr val="9AABC4"/>
+                        </a:solidFill>
+                        <a:latin typeface="Segoe UI"/>
+                      </a:endParaRPr>
                     </a:p>
                   </a:txBody>
                   <a:tcPr marL="118872" anchor="ctr">
@@ -12278,8 +13962,8 @@
         </p:nvSpPr>
         <p:spPr>
           <a:xfrm>
-            <a:off x="6858000" y="2103120"/>
-            <a:ext cx="4206240" cy="365760"/>
+            <a:off x="6857999" y="2103120"/>
+            <a:ext cx="4326673" cy="261610"/>
           </a:xfrm>
           <a:prstGeom prst="rect">
             <a:avLst/>
@@ -12298,404 +13982,20 @@
               </a:lnSpc>
             </a:pPr>
             <a:r>
-              <a:rPr sz="1700" b="1" i="0">
+              <a:rPr lang="es-AR" sz="1700" b="1" dirty="0">
                 <a:solidFill>
                   <a:srgbClr val="22D3EE"/>
                 </a:solidFill>
                 <a:latin typeface="Segoe UI Semibold"/>
               </a:rPr>
-              <a:t>Lo que usamos del micro</a:t>
-            </a:r>
-          </a:p>
-        </p:txBody>
-      </p:sp>
-      <p:sp>
-        <p:nvSpPr>
-          <p:cNvPr id="9" name="TextBox 8"/>
-          <p:cNvSpPr txBox="1"/>
-          <p:nvPr/>
-        </p:nvSpPr>
-        <p:spPr>
-          <a:xfrm>
-            <a:off x="6858000" y="2606040"/>
-            <a:ext cx="4206240" cy="274320"/>
-          </a:xfrm>
-          <a:prstGeom prst="rect">
-            <a:avLst/>
-          </a:prstGeom>
-          <a:noFill/>
-        </p:spPr>
-        <p:txBody>
-          <a:bodyPr wrap="square" lIns="0" tIns="0" rIns="0" bIns="0" anchor="t">
-            <a:spAutoFit/>
-          </a:bodyPr>
-          <a:lstStyle/>
-          <a:p>
-            <a:pPr algn="l">
-              <a:lnSpc>
-                <a:spcPct val="100000"/>
-              </a:lnSpc>
-            </a:pPr>
-            <a:r>
-              <a:rPr sz="1300" b="1" i="0">
-                <a:solidFill>
-                  <a:srgbClr val="FFFFFF"/>
-                </a:solidFill>
-                <a:latin typeface="Segoe UI"/>
-              </a:rPr>
-              <a:t>Núcleo</a:t>
-            </a:r>
-          </a:p>
-        </p:txBody>
-      </p:sp>
-      <p:sp>
-        <p:nvSpPr>
-          <p:cNvPr id="10" name="TextBox 9"/>
-          <p:cNvSpPr txBox="1"/>
-          <p:nvPr/>
-        </p:nvSpPr>
-        <p:spPr>
-          <a:xfrm>
-            <a:off x="6858000" y="2880360"/>
-            <a:ext cx="4206240" cy="320040"/>
-          </a:xfrm>
-          <a:prstGeom prst="rect">
-            <a:avLst/>
-          </a:prstGeom>
-          <a:noFill/>
-        </p:spPr>
-        <p:txBody>
-          <a:bodyPr wrap="square" lIns="0" tIns="0" rIns="0" bIns="0" anchor="t">
-            <a:spAutoFit/>
-          </a:bodyPr>
-          <a:lstStyle/>
-          <a:p>
-            <a:pPr algn="l">
-              <a:lnSpc>
-                <a:spcPct val="100000"/>
-              </a:lnSpc>
-            </a:pPr>
-            <a:r>
-              <a:rPr sz="1300" b="0" i="0">
-                <a:solidFill>
-                  <a:srgbClr val="9AABC4"/>
-                </a:solidFill>
-                <a:latin typeface="Segoe UI"/>
-              </a:rPr>
-              <a:t>ARM Cortex-M4 @ 180 MHz + FPU</a:t>
-            </a:r>
-          </a:p>
-        </p:txBody>
-      </p:sp>
-      <p:sp>
-        <p:nvSpPr>
-          <p:cNvPr id="11" name="TextBox 10"/>
-          <p:cNvSpPr txBox="1"/>
-          <p:nvPr/>
-        </p:nvSpPr>
-        <p:spPr>
-          <a:xfrm>
-            <a:off x="6858000" y="3264408"/>
-            <a:ext cx="4206240" cy="274320"/>
-          </a:xfrm>
-          <a:prstGeom prst="rect">
-            <a:avLst/>
-          </a:prstGeom>
-          <a:noFill/>
-        </p:spPr>
-        <p:txBody>
-          <a:bodyPr wrap="square" lIns="0" tIns="0" rIns="0" bIns="0" anchor="t">
-            <a:spAutoFit/>
-          </a:bodyPr>
-          <a:lstStyle/>
-          <a:p>
-            <a:pPr algn="l">
-              <a:lnSpc>
-                <a:spcPct val="100000"/>
-              </a:lnSpc>
-            </a:pPr>
-            <a:r>
-              <a:rPr sz="1300" b="1" i="0">
-                <a:solidFill>
-                  <a:srgbClr val="FFFFFF"/>
-                </a:solidFill>
-                <a:latin typeface="Segoe UI"/>
-              </a:rPr>
-              <a:t>DAC</a:t>
-            </a:r>
-          </a:p>
-        </p:txBody>
-      </p:sp>
-      <p:sp>
-        <p:nvSpPr>
-          <p:cNvPr id="12" name="TextBox 11"/>
-          <p:cNvSpPr txBox="1"/>
-          <p:nvPr/>
-        </p:nvSpPr>
-        <p:spPr>
-          <a:xfrm>
-            <a:off x="6858000" y="3538728"/>
-            <a:ext cx="4206240" cy="320040"/>
-          </a:xfrm>
-          <a:prstGeom prst="rect">
-            <a:avLst/>
-          </a:prstGeom>
-          <a:noFill/>
-        </p:spPr>
-        <p:txBody>
-          <a:bodyPr wrap="square" lIns="0" tIns="0" rIns="0" bIns="0" anchor="t">
-            <a:spAutoFit/>
-          </a:bodyPr>
-          <a:lstStyle/>
-          <a:p>
-            <a:pPr algn="l">
-              <a:lnSpc>
-                <a:spcPct val="100000"/>
-              </a:lnSpc>
-            </a:pPr>
-            <a:r>
-              <a:rPr sz="1300" b="0" i="0">
-                <a:solidFill>
-                  <a:srgbClr val="9AABC4"/>
-                </a:solidFill>
-                <a:latin typeface="Segoe UI"/>
-              </a:rPr>
-              <a:t>2 canales, 12 bits — salida en PA4</a:t>
-            </a:r>
-          </a:p>
-        </p:txBody>
-      </p:sp>
-      <p:sp>
-        <p:nvSpPr>
-          <p:cNvPr id="13" name="TextBox 12"/>
-          <p:cNvSpPr txBox="1"/>
-          <p:nvPr/>
-        </p:nvSpPr>
-        <p:spPr>
-          <a:xfrm>
-            <a:off x="6858000" y="3922776"/>
-            <a:ext cx="4206240" cy="274320"/>
-          </a:xfrm>
-          <a:prstGeom prst="rect">
-            <a:avLst/>
-          </a:prstGeom>
-          <a:noFill/>
-        </p:spPr>
-        <p:txBody>
-          <a:bodyPr wrap="square" lIns="0" tIns="0" rIns="0" bIns="0" anchor="t">
-            <a:spAutoFit/>
-          </a:bodyPr>
-          <a:lstStyle/>
-          <a:p>
-            <a:pPr algn="l">
-              <a:lnSpc>
-                <a:spcPct val="100000"/>
-              </a:lnSpc>
-            </a:pPr>
-            <a:r>
-              <a:rPr sz="1300" b="1" i="0">
-                <a:solidFill>
-                  <a:srgbClr val="FFFFFF"/>
-                </a:solidFill>
-                <a:latin typeface="Segoe UI"/>
-              </a:rPr>
-              <a:t>Memoria</a:t>
-            </a:r>
-          </a:p>
-        </p:txBody>
-      </p:sp>
-      <p:sp>
-        <p:nvSpPr>
-          <p:cNvPr id="14" name="TextBox 13"/>
-          <p:cNvSpPr txBox="1"/>
-          <p:nvPr/>
-        </p:nvSpPr>
-        <p:spPr>
-          <a:xfrm>
-            <a:off x="6858000" y="4197096"/>
-            <a:ext cx="4206240" cy="320040"/>
-          </a:xfrm>
-          <a:prstGeom prst="rect">
-            <a:avLst/>
-          </a:prstGeom>
-          <a:noFill/>
-        </p:spPr>
-        <p:txBody>
-          <a:bodyPr wrap="square" lIns="0" tIns="0" rIns="0" bIns="0" anchor="t">
-            <a:spAutoFit/>
-          </a:bodyPr>
-          <a:lstStyle/>
-          <a:p>
-            <a:pPr algn="l">
-              <a:lnSpc>
-                <a:spcPct val="100000"/>
-              </a:lnSpc>
-            </a:pPr>
-            <a:r>
-              <a:rPr sz="1300" b="0" i="0">
-                <a:solidFill>
-                  <a:srgbClr val="9AABC4"/>
-                </a:solidFill>
-                <a:latin typeface="Segoe UI"/>
-              </a:rPr>
-              <a:t>512 KB Flash · 128 KB RAM</a:t>
-            </a:r>
-          </a:p>
-        </p:txBody>
-      </p:sp>
-      <p:sp>
-        <p:nvSpPr>
-          <p:cNvPr id="15" name="TextBox 14"/>
-          <p:cNvSpPr txBox="1"/>
-          <p:nvPr/>
-        </p:nvSpPr>
-        <p:spPr>
-          <a:xfrm>
-            <a:off x="6858000" y="4581144"/>
-            <a:ext cx="4206240" cy="274320"/>
-          </a:xfrm>
-          <a:prstGeom prst="rect">
-            <a:avLst/>
-          </a:prstGeom>
-          <a:noFill/>
-        </p:spPr>
-        <p:txBody>
-          <a:bodyPr wrap="square" lIns="0" tIns="0" rIns="0" bIns="0" anchor="t">
-            <a:spAutoFit/>
-          </a:bodyPr>
-          <a:lstStyle/>
-          <a:p>
-            <a:pPr algn="l">
-              <a:lnSpc>
-                <a:spcPct val="100000"/>
-              </a:lnSpc>
-            </a:pPr>
-            <a:r>
-              <a:rPr sz="1300" b="1" i="0">
-                <a:solidFill>
-                  <a:srgbClr val="FFFFFF"/>
-                </a:solidFill>
-                <a:latin typeface="Segoe UI"/>
-              </a:rPr>
-              <a:t>Comunicación</a:t>
-            </a:r>
-          </a:p>
-        </p:txBody>
-      </p:sp>
-      <p:sp>
-        <p:nvSpPr>
-          <p:cNvPr id="16" name="TextBox 15"/>
-          <p:cNvSpPr txBox="1"/>
-          <p:nvPr/>
-        </p:nvSpPr>
-        <p:spPr>
-          <a:xfrm>
-            <a:off x="6858000" y="4855464"/>
-            <a:ext cx="4206240" cy="320040"/>
-          </a:xfrm>
-          <a:prstGeom prst="rect">
-            <a:avLst/>
-          </a:prstGeom>
-          <a:noFill/>
-        </p:spPr>
-        <p:txBody>
-          <a:bodyPr wrap="square" lIns="0" tIns="0" rIns="0" bIns="0" anchor="t">
-            <a:spAutoFit/>
-          </a:bodyPr>
-          <a:lstStyle/>
-          <a:p>
-            <a:pPr algn="l">
-              <a:lnSpc>
-                <a:spcPct val="100000"/>
-              </a:lnSpc>
-            </a:pPr>
-            <a:r>
-              <a:rPr sz="1300" b="0" i="0">
-                <a:solidFill>
-                  <a:srgbClr val="9AABC4"/>
-                </a:solidFill>
-                <a:latin typeface="Segoe UI"/>
-              </a:rPr>
-              <a:t>USART2 → ST-Link → puerto COM por USB</a:t>
-            </a:r>
-          </a:p>
-        </p:txBody>
-      </p:sp>
-      <p:sp>
-        <p:nvSpPr>
-          <p:cNvPr id="17" name="TextBox 16"/>
-          <p:cNvSpPr txBox="1"/>
-          <p:nvPr/>
-        </p:nvSpPr>
-        <p:spPr>
-          <a:xfrm>
-            <a:off x="6858000" y="5239512"/>
-            <a:ext cx="4206240" cy="274320"/>
-          </a:xfrm>
-          <a:prstGeom prst="rect">
-            <a:avLst/>
-          </a:prstGeom>
-          <a:noFill/>
-        </p:spPr>
-        <p:txBody>
-          <a:bodyPr wrap="square" lIns="0" tIns="0" rIns="0" bIns="0" anchor="t">
-            <a:spAutoFit/>
-          </a:bodyPr>
-          <a:lstStyle/>
-          <a:p>
-            <a:pPr algn="l">
-              <a:lnSpc>
-                <a:spcPct val="100000"/>
-              </a:lnSpc>
-            </a:pPr>
-            <a:r>
-              <a:rPr sz="1300" b="1" i="0">
-                <a:solidFill>
-                  <a:srgbClr val="FFFFFF"/>
-                </a:solidFill>
-                <a:latin typeface="Segoe UI"/>
-              </a:rPr>
-              <a:t>Periféricos clave</a:t>
-            </a:r>
-          </a:p>
-        </p:txBody>
-      </p:sp>
-      <p:sp>
-        <p:nvSpPr>
-          <p:cNvPr id="18" name="TextBox 17"/>
-          <p:cNvSpPr txBox="1"/>
-          <p:nvPr/>
-        </p:nvSpPr>
-        <p:spPr>
-          <a:xfrm>
-            <a:off x="6858000" y="5513831"/>
-            <a:ext cx="4206240" cy="320040"/>
-          </a:xfrm>
-          <a:prstGeom prst="rect">
-            <a:avLst/>
-          </a:prstGeom>
-          <a:noFill/>
-        </p:spPr>
-        <p:txBody>
-          <a:bodyPr wrap="square" lIns="0" tIns="0" rIns="0" bIns="0" anchor="t">
-            <a:spAutoFit/>
-          </a:bodyPr>
-          <a:lstStyle/>
-          <a:p>
-            <a:pPr algn="l">
-              <a:lnSpc>
-                <a:spcPct val="100000"/>
-              </a:lnSpc>
-            </a:pPr>
-            <a:r>
-              <a:rPr sz="1300" b="0" i="0">
-                <a:solidFill>
-                  <a:srgbClr val="9AABC4"/>
-                </a:solidFill>
-                <a:latin typeface="Segoe UI"/>
-              </a:rPr>
-              <a:t>TIM2 (base de tiempo), DMA, SPI, I²S</a:t>
-            </a:r>
+              <a:t>CARACTERISTICAS RELEVANTES DEL MICRO</a:t>
+            </a:r>
+            <a:endParaRPr sz="1700" b="1" i="0" dirty="0">
+              <a:solidFill>
+                <a:srgbClr val="22D3EE"/>
+              </a:solidFill>
+              <a:latin typeface="Segoe UI Semibold"/>
+            </a:endParaRPr>
           </a:p>
         </p:txBody>
       </p:sp>
@@ -12792,7 +14092,7 @@
           <p:nvPr/>
         </p:nvPicPr>
         <p:blipFill>
-          <a:blip r:embed="rId2"/>
+          <a:blip r:embed="rId3"/>
           <a:stretch>
             <a:fillRect/>
           </a:stretch>
@@ -12807,6 +14107,189 @@
           </a:prstGeom>
         </p:spPr>
       </p:pic>
+      <p:sp>
+        <p:nvSpPr>
+          <p:cNvPr id="6" name="CuadroTexto 5">
+            <a:extLst>
+              <a:ext uri="{FF2B5EF4-FFF2-40B4-BE49-F238E27FC236}">
+                <a16:creationId xmlns:a16="http://schemas.microsoft.com/office/drawing/2014/main" id="{B1543285-53D1-0B0A-19EA-177D891B3EEC}"/>
+              </a:ext>
+            </a:extLst>
+          </p:cNvPr>
+          <p:cNvSpPr txBox="1"/>
+          <p:nvPr/>
+        </p:nvSpPr>
+        <p:spPr>
+          <a:xfrm>
+            <a:off x="6857999" y="2553629"/>
+            <a:ext cx="4326673" cy="3139321"/>
+          </a:xfrm>
+          <a:prstGeom prst="rect">
+            <a:avLst/>
+          </a:prstGeom>
+          <a:noFill/>
+        </p:spPr>
+        <p:txBody>
+          <a:bodyPr wrap="square" rtlCol="0">
+            <a:spAutoFit/>
+          </a:bodyPr>
+          <a:lstStyle/>
+          <a:p>
+            <a:pPr marL="285750" indent="-285750">
+              <a:buFont typeface="Arial" panose="020B0604020202020204" pitchFamily="34" charset="0"/>
+              <a:buChar char="•"/>
+            </a:pPr>
+            <a:r>
+              <a:rPr lang="es-AR" dirty="0">
+                <a:solidFill>
+                  <a:schemeClr val="bg1"/>
+                </a:solidFill>
+              </a:rPr>
+              <a:t>Interfaz SAI / I²S </a:t>
+            </a:r>
+          </a:p>
+          <a:p>
+            <a:pPr marL="285750" indent="-285750">
+              <a:buFont typeface="Arial" panose="020B0604020202020204" pitchFamily="34" charset="0"/>
+              <a:buChar char="•"/>
+            </a:pPr>
+            <a:r>
+              <a:rPr lang="es-AR" dirty="0">
+                <a:solidFill>
+                  <a:schemeClr val="bg1"/>
+                </a:solidFill>
+              </a:rPr>
+              <a:t>DMA </a:t>
+            </a:r>
+          </a:p>
+          <a:p>
+            <a:pPr marL="285750" indent="-285750">
+              <a:buFont typeface="Arial" panose="020B0604020202020204" pitchFamily="34" charset="0"/>
+              <a:buChar char="•"/>
+            </a:pPr>
+            <a:r>
+              <a:rPr lang="es-AR" dirty="0">
+                <a:solidFill>
+                  <a:schemeClr val="bg1"/>
+                </a:solidFill>
+              </a:rPr>
+              <a:t>Frecuencia de operación </a:t>
+            </a:r>
+          </a:p>
+          <a:p>
+            <a:pPr marL="285750" indent="-285750">
+              <a:buFont typeface="Arial" panose="020B0604020202020204" pitchFamily="34" charset="0"/>
+              <a:buChar char="•"/>
+            </a:pPr>
+            <a:r>
+              <a:rPr lang="es-AR" dirty="0">
+                <a:solidFill>
+                  <a:schemeClr val="bg1"/>
+                </a:solidFill>
+              </a:rPr>
+              <a:t>Temporizadores </a:t>
+            </a:r>
+          </a:p>
+          <a:p>
+            <a:pPr marL="285750" indent="-285750">
+              <a:buFont typeface="Arial" panose="020B0604020202020204" pitchFamily="34" charset="0"/>
+              <a:buChar char="•"/>
+            </a:pPr>
+            <a:r>
+              <a:rPr lang="es-AR" dirty="0">
+                <a:solidFill>
+                  <a:schemeClr val="bg1"/>
+                </a:solidFill>
+              </a:rPr>
+              <a:t>Núcleo ARM Cortex-M4 con DSP </a:t>
+            </a:r>
+          </a:p>
+          <a:p>
+            <a:pPr marL="285750" indent="-285750">
+              <a:buFont typeface="Arial" panose="020B0604020202020204" pitchFamily="34" charset="0"/>
+              <a:buChar char="•"/>
+            </a:pPr>
+            <a:r>
+              <a:rPr lang="es-AR" dirty="0">
+                <a:solidFill>
+                  <a:schemeClr val="bg1"/>
+                </a:solidFill>
+              </a:rPr>
+              <a:t>Unidad de punto flotante (FPU) </a:t>
+            </a:r>
+          </a:p>
+          <a:p>
+            <a:pPr marL="285750" indent="-285750">
+              <a:buFont typeface="Arial" panose="020B0604020202020204" pitchFamily="34" charset="0"/>
+              <a:buChar char="•"/>
+            </a:pPr>
+            <a:r>
+              <a:rPr lang="es-AR" dirty="0">
+                <a:solidFill>
+                  <a:schemeClr val="bg1"/>
+                </a:solidFill>
+              </a:rPr>
+              <a:t>Memoria SRAM </a:t>
+            </a:r>
+          </a:p>
+          <a:p>
+            <a:pPr marL="285750" indent="-285750">
+              <a:buFont typeface="Arial" panose="020B0604020202020204" pitchFamily="34" charset="0"/>
+              <a:buChar char="•"/>
+            </a:pPr>
+            <a:r>
+              <a:rPr lang="es-AR" dirty="0">
+                <a:solidFill>
+                  <a:schemeClr val="bg1"/>
+                </a:solidFill>
+              </a:rPr>
+              <a:t>Memoria Flash </a:t>
+            </a:r>
+          </a:p>
+          <a:p>
+            <a:pPr marL="285750" indent="-285750">
+              <a:buFont typeface="Arial" panose="020B0604020202020204" pitchFamily="34" charset="0"/>
+              <a:buChar char="•"/>
+            </a:pPr>
+            <a:r>
+              <a:rPr lang="es-AR" dirty="0">
+                <a:solidFill>
+                  <a:schemeClr val="bg1"/>
+                </a:solidFill>
+              </a:rPr>
+              <a:t>DAC </a:t>
+            </a:r>
+          </a:p>
+          <a:p>
+            <a:pPr marL="285750" indent="-285750">
+              <a:buFont typeface="Arial" panose="020B0604020202020204" pitchFamily="34" charset="0"/>
+              <a:buChar char="•"/>
+            </a:pPr>
+            <a:r>
+              <a:rPr lang="es-AR" dirty="0">
+                <a:solidFill>
+                  <a:schemeClr val="bg1"/>
+                </a:solidFill>
+              </a:rPr>
+              <a:t>ADC </a:t>
+            </a:r>
+          </a:p>
+          <a:p>
+            <a:pPr marL="285750" indent="-285750">
+              <a:buFont typeface="Arial" panose="020B0604020202020204" pitchFamily="34" charset="0"/>
+              <a:buChar char="•"/>
+            </a:pPr>
+            <a:r>
+              <a:rPr lang="es-AR" dirty="0">
+                <a:solidFill>
+                  <a:schemeClr val="bg1"/>
+                </a:solidFill>
+              </a:rPr>
+              <a:t>Capacidad para implementar DDS</a:t>
+            </a:r>
+          </a:p>
+        </p:txBody>
+      </p:sp>
     </p:spTree>
   </p:cSld>
   <p:clrMapOvr>
@@ -12840,7 +14323,7 @@
         </p:nvSpPr>
         <p:spPr>
           <a:xfrm>
-            <a:off x="0" y="0"/>
+            <a:off x="305" y="-45720"/>
             <a:ext cx="12191695" cy="6858000"/>
           </a:xfrm>
           <a:prstGeom prst="rect">
@@ -13419,7 +14902,7 @@
           <a:p>
             <a:pPr algn="ctr"/>
             <a:r>
-              <a:rPr sz="1400" b="1">
+              <a:rPr sz="1400" b="1" dirty="0">
                 <a:solidFill>
                   <a:srgbClr val="FFFFFF"/>
                 </a:solidFill>
@@ -13431,7 +14914,7 @@
           <a:p>
             <a:pPr algn="ctr"/>
             <a:r>
-              <a:rPr sz="1050">
+              <a:rPr sz="1050" dirty="0">
                 <a:solidFill>
                   <a:srgbClr val="22D3EE"/>
                 </a:solidFill>
@@ -17210,7 +18693,7 @@
               </a:spcAft>
             </a:pPr>
             <a:r>
-              <a:rPr sz="1700" b="1">
+              <a:rPr sz="1700" b="1" dirty="0">
                 <a:solidFill>
                   <a:srgbClr val="22D3EE"/>
                 </a:solidFill>
@@ -17219,22 +18702,103 @@
               <a:t>▸  </a:t>
             </a:r>
             <a:r>
-              <a:rPr sz="1700" b="1">
+              <a:rPr sz="1700" b="1" dirty="0" err="1">
                 <a:solidFill>
                   <a:srgbClr val="E8EEF7"/>
                 </a:solidFill>
                 <a:latin typeface="Segoe UI"/>
               </a:rPr>
-              <a:t>Potencia de 2 (2¹³)</a:t>
-            </a:r>
-            <a:r>
-              <a:rPr sz="1700">
+              <a:t>Potencia</a:t>
+            </a:r>
+            <a:r>
+              <a:rPr sz="1700" b="1" dirty="0">
+                <a:solidFill>
+                  <a:srgbClr val="E8EEF7"/>
+                </a:solidFill>
+                <a:latin typeface="Segoe UI"/>
+              </a:rPr>
+              <a:t> de 2 (2¹³)</a:t>
+            </a:r>
+            <a:r>
+              <a:rPr sz="1700" dirty="0">
                 <a:solidFill>
                   <a:srgbClr val="9AABC4"/>
                 </a:solidFill>
                 <a:latin typeface="Segoe UI"/>
               </a:rPr>
-              <a:t>  —  el índice sale con un simple corrimiento de bits (acc &gt;&gt; 19), rapidísimo en la ISR</a:t>
+              <a:t>  —  el </a:t>
+            </a:r>
+            <a:r>
+              <a:rPr sz="1700" dirty="0" err="1">
+                <a:solidFill>
+                  <a:srgbClr val="9AABC4"/>
+                </a:solidFill>
+                <a:latin typeface="Segoe UI"/>
+              </a:rPr>
+              <a:t>índice</a:t>
+            </a:r>
+            <a:r>
+              <a:rPr sz="1700" dirty="0">
+                <a:solidFill>
+                  <a:srgbClr val="9AABC4"/>
+                </a:solidFill>
+                <a:latin typeface="Segoe UI"/>
+              </a:rPr>
+              <a:t> sale con un simple </a:t>
+            </a:r>
+            <a:r>
+              <a:rPr sz="1700" dirty="0" err="1">
+                <a:solidFill>
+                  <a:srgbClr val="9AABC4"/>
+                </a:solidFill>
+                <a:latin typeface="Segoe UI"/>
+              </a:rPr>
+              <a:t>corrimiento</a:t>
+            </a:r>
+            <a:r>
+              <a:rPr sz="1700" dirty="0">
+                <a:solidFill>
+                  <a:srgbClr val="9AABC4"/>
+                </a:solidFill>
+                <a:latin typeface="Segoe UI"/>
+              </a:rPr>
+              <a:t> de bits (acc &gt;&gt; 19), </a:t>
+            </a:r>
+            <a:r>
+              <a:rPr sz="1700" dirty="0" err="1">
+                <a:solidFill>
+                  <a:srgbClr val="9AABC4"/>
+                </a:solidFill>
+                <a:latin typeface="Segoe UI"/>
+              </a:rPr>
+              <a:t>rapidísimo</a:t>
+            </a:r>
+            <a:r>
+              <a:rPr sz="1700" dirty="0">
+                <a:solidFill>
+                  <a:srgbClr val="9AABC4"/>
+                </a:solidFill>
+                <a:latin typeface="Segoe UI"/>
+              </a:rPr>
+              <a:t> </a:t>
+            </a:r>
+            <a:r>
+              <a:rPr sz="1700" dirty="0" err="1">
+                <a:solidFill>
+                  <a:srgbClr val="9AABC4"/>
+                </a:solidFill>
+                <a:latin typeface="Segoe UI"/>
+              </a:rPr>
+              <a:t>en</a:t>
+            </a:r>
+            <a:r>
+              <a:rPr sz="1700" dirty="0">
+                <a:solidFill>
+                  <a:srgbClr val="9AABC4"/>
+                </a:solidFill>
+                <a:latin typeface="Segoe UI"/>
+              </a:rPr>
+              <a:t> la ISR</a:t>
             </a:r>
           </a:p>
           <a:p>
@@ -17247,7 +18811,7 @@
               </a:spcAft>
             </a:pPr>
             <a:r>
-              <a:rPr sz="1700" b="1">
+              <a:rPr sz="1700" b="1" dirty="0">
                 <a:solidFill>
                   <a:srgbClr val="22D3EE"/>
                 </a:solidFill>
@@ -17256,23 +18820,155 @@
               <a:t>▸  </a:t>
             </a:r>
             <a:r>
-              <a:rPr sz="1700" b="1">
+              <a:rPr sz="1700" b="1" dirty="0">
                 <a:solidFill>
                   <a:srgbClr val="E8EEF7"/>
                 </a:solidFill>
                 <a:latin typeface="Segoe UI"/>
               </a:rPr>
-              <a:t>Buena resolución de fase</a:t>
-            </a:r>
-            <a:r>
-              <a:rPr sz="1700">
+              <a:t>Buena </a:t>
+            </a:r>
+            <a:r>
+              <a:rPr sz="1700" b="1" dirty="0" err="1">
+                <a:solidFill>
+                  <a:srgbClr val="E8EEF7"/>
+                </a:solidFill>
+                <a:latin typeface="Segoe UI"/>
+              </a:rPr>
+              <a:t>resolución</a:t>
+            </a:r>
+            <a:r>
+              <a:rPr sz="1700" b="1" dirty="0">
+                <a:solidFill>
+                  <a:srgbClr val="E8EEF7"/>
+                </a:solidFill>
+                <a:latin typeface="Segoe UI"/>
+              </a:rPr>
+              <a:t> de </a:t>
+            </a:r>
+            <a:r>
+              <a:rPr sz="1700" b="1" dirty="0" err="1">
+                <a:solidFill>
+                  <a:srgbClr val="E8EEF7"/>
+                </a:solidFill>
+                <a:latin typeface="Segoe UI"/>
+              </a:rPr>
+              <a:t>fase</a:t>
+            </a:r>
+            <a:r>
+              <a:rPr sz="1700" dirty="0">
                 <a:solidFill>
                   <a:srgbClr val="9AABC4"/>
                 </a:solidFill>
                 <a:latin typeface="Segoe UI"/>
               </a:rPr>
-              <a:t>  —  8192 muestras por vuelta = una senoidal bien detallada</a:t>
-            </a:r>
+              <a:t>  —  8192 </a:t>
+            </a:r>
+            <a:r>
+              <a:rPr sz="1700" dirty="0" err="1">
+                <a:solidFill>
+                  <a:srgbClr val="9AABC4"/>
+                </a:solidFill>
+                <a:latin typeface="Segoe UI"/>
+              </a:rPr>
+              <a:t>muestras</a:t>
+            </a:r>
+            <a:r>
+              <a:rPr sz="1700" dirty="0">
+                <a:solidFill>
+                  <a:srgbClr val="9AABC4"/>
+                </a:solidFill>
+                <a:latin typeface="Segoe UI"/>
+              </a:rPr>
+              <a:t> </a:t>
+            </a:r>
+            <a:r>
+              <a:rPr sz="1700" dirty="0" err="1">
+                <a:solidFill>
+                  <a:srgbClr val="9AABC4"/>
+                </a:solidFill>
+                <a:latin typeface="Segoe UI"/>
+              </a:rPr>
+              <a:t>por</a:t>
+            </a:r>
+            <a:r>
+              <a:rPr sz="1700" dirty="0">
+                <a:solidFill>
+                  <a:srgbClr val="9AABC4"/>
+                </a:solidFill>
+                <a:latin typeface="Segoe UI"/>
+              </a:rPr>
+              <a:t> </a:t>
+            </a:r>
+            <a:r>
+              <a:rPr sz="1700" dirty="0" err="1">
+                <a:solidFill>
+                  <a:srgbClr val="9AABC4"/>
+                </a:solidFill>
+                <a:latin typeface="Segoe UI"/>
+              </a:rPr>
+              <a:t>vuelta</a:t>
+            </a:r>
+            <a:r>
+              <a:rPr sz="1700" dirty="0">
+                <a:solidFill>
+                  <a:srgbClr val="9AABC4"/>
+                </a:solidFill>
+                <a:latin typeface="Segoe UI"/>
+              </a:rPr>
+              <a:t> = </a:t>
+            </a:r>
+            <a:r>
+              <a:rPr sz="1700" dirty="0" err="1">
+                <a:solidFill>
+                  <a:srgbClr val="9AABC4"/>
+                </a:solidFill>
+                <a:latin typeface="Segoe UI"/>
+              </a:rPr>
+              <a:t>una</a:t>
+            </a:r>
+            <a:r>
+              <a:rPr sz="1700" dirty="0">
+                <a:solidFill>
+                  <a:srgbClr val="9AABC4"/>
+                </a:solidFill>
+                <a:latin typeface="Segoe UI"/>
+              </a:rPr>
+              <a:t> </a:t>
+            </a:r>
+            <a:r>
+              <a:rPr sz="1700" dirty="0" err="1">
+                <a:solidFill>
+                  <a:srgbClr val="9AABC4"/>
+                </a:solidFill>
+                <a:latin typeface="Segoe UI"/>
+              </a:rPr>
+              <a:t>senoidal</a:t>
+            </a:r>
+            <a:r>
+              <a:rPr sz="1700" dirty="0">
+                <a:solidFill>
+                  <a:srgbClr val="9AABC4"/>
+                </a:solidFill>
+                <a:latin typeface="Segoe UI"/>
+              </a:rPr>
+              <a:t> bien </a:t>
+            </a:r>
+            <a:r>
+              <a:rPr sz="1700" dirty="0" err="1">
+                <a:solidFill>
+                  <a:srgbClr val="9AABC4"/>
+                </a:solidFill>
+                <a:latin typeface="Segoe UI"/>
+              </a:rPr>
+              <a:t>detallada</a:t>
+            </a:r>
+            <a:endParaRPr sz="1700" dirty="0">
+              <a:solidFill>
+                <a:srgbClr val="9AABC4"/>
+              </a:solidFill>
+              <a:latin typeface="Segoe UI"/>
+            </a:endParaRPr>
           </a:p>
           <a:p>
             <a:pPr>
@@ -17284,7 +18980,7 @@
               </a:spcAft>
             </a:pPr>
             <a:r>
-              <a:rPr sz="1700" b="1">
+              <a:rPr sz="1700" b="1" dirty="0">
                 <a:solidFill>
                   <a:srgbClr val="22D3EE"/>
                 </a:solidFill>
@@ -17293,22 +18989,49 @@
               <a:t>▸  </a:t>
             </a:r>
             <a:r>
-              <a:rPr sz="1700" b="1">
+              <a:rPr sz="1700" b="1" dirty="0">
                 <a:solidFill>
                   <a:srgbClr val="E8EEF7"/>
                 </a:solidFill>
                 <a:latin typeface="Segoe UI"/>
               </a:rPr>
-              <a:t>Memoria acotada</a:t>
-            </a:r>
-            <a:r>
-              <a:rPr sz="1700">
+              <a:t>Memoria </a:t>
+            </a:r>
+            <a:r>
+              <a:rPr sz="1700" b="1" dirty="0" err="1">
+                <a:solidFill>
+                  <a:srgbClr val="E8EEF7"/>
+                </a:solidFill>
+                <a:latin typeface="Segoe UI"/>
+              </a:rPr>
+              <a:t>acotada</a:t>
+            </a:r>
+            <a:r>
+              <a:rPr sz="1700" dirty="0">
                 <a:solidFill>
                   <a:srgbClr val="9AABC4"/>
                 </a:solidFill>
                 <a:latin typeface="Segoe UI"/>
               </a:rPr>
-              <a:t>  —  8192 × 2 bytes = 16 KB en Flash: nada para el F446</a:t>
+              <a:t>  —  8192 × 2 bytes = 16 KB </a:t>
+            </a:r>
+            <a:r>
+              <a:rPr sz="1700" dirty="0" err="1">
+                <a:solidFill>
+                  <a:srgbClr val="9AABC4"/>
+                </a:solidFill>
+                <a:latin typeface="Segoe UI"/>
+              </a:rPr>
+              <a:t>en</a:t>
+            </a:r>
+            <a:r>
+              <a:rPr sz="1700" dirty="0">
+                <a:solidFill>
+                  <a:srgbClr val="9AABC4"/>
+                </a:solidFill>
+                <a:latin typeface="Segoe UI"/>
+              </a:rPr>
+              <a:t> Flash: nada para el F446</a:t>
             </a:r>
           </a:p>
           <a:p>
@@ -17321,7 +19044,7 @@
               </a:spcAft>
             </a:pPr>
             <a:r>
-              <a:rPr sz="1700" b="1">
+              <a:rPr sz="1700" b="1" dirty="0">
                 <a:solidFill>
                   <a:srgbClr val="22D3EE"/>
                 </a:solidFill>
@@ -17330,23 +19053,83 @@
               <a:t>▸  </a:t>
             </a:r>
             <a:r>
-              <a:rPr sz="1700" b="1">
+              <a:rPr sz="1700" b="1" dirty="0" err="1">
                 <a:solidFill>
                   <a:srgbClr val="E8EEF7"/>
                 </a:solidFill>
                 <a:latin typeface="Segoe UI"/>
               </a:rPr>
-              <a:t>Compartimos el micro con el ADC</a:t>
-            </a:r>
-            <a:r>
-              <a:rPr sz="1700">
+              <a:t>Compartimos</a:t>
+            </a:r>
+            <a:r>
+              <a:rPr sz="1700" b="1" dirty="0">
+                <a:solidFill>
+                  <a:srgbClr val="E8EEF7"/>
+                </a:solidFill>
+                <a:latin typeface="Segoe UI"/>
+              </a:rPr>
+              <a:t> el micro con el ADC</a:t>
+            </a:r>
+            <a:r>
+              <a:rPr sz="1700" dirty="0">
                 <a:solidFill>
                   <a:srgbClr val="9AABC4"/>
                 </a:solidFill>
                 <a:latin typeface="Segoe UI"/>
               </a:rPr>
-              <a:t>  —  no derrochar Flash/RAM: 8192 es el equilibrio justo</a:t>
-            </a:r>
+              <a:t>  —  no </a:t>
+            </a:r>
+            <a:r>
+              <a:rPr sz="1700" dirty="0" err="1">
+                <a:solidFill>
+                  <a:srgbClr val="9AABC4"/>
+                </a:solidFill>
+                <a:latin typeface="Segoe UI"/>
+              </a:rPr>
+              <a:t>derrochar</a:t>
+            </a:r>
+            <a:r>
+              <a:rPr sz="1700" dirty="0">
+                <a:solidFill>
+                  <a:srgbClr val="9AABC4"/>
+                </a:solidFill>
+                <a:latin typeface="Segoe UI"/>
+              </a:rPr>
+              <a:t> Flash/RAM: 8192 es el </a:t>
+            </a:r>
+            <a:r>
+              <a:rPr sz="1700" dirty="0" err="1">
+                <a:solidFill>
+                  <a:srgbClr val="9AABC4"/>
+                </a:solidFill>
+                <a:latin typeface="Segoe UI"/>
+              </a:rPr>
+              <a:t>equilibrio</a:t>
+            </a:r>
+            <a:r>
+              <a:rPr sz="1700" dirty="0">
+                <a:solidFill>
+                  <a:srgbClr val="9AABC4"/>
+                </a:solidFill>
+                <a:latin typeface="Segoe UI"/>
+              </a:rPr>
+              <a:t> </a:t>
+            </a:r>
+            <a:r>
+              <a:rPr sz="1700" dirty="0" err="1">
+                <a:solidFill>
+                  <a:srgbClr val="9AABC4"/>
+                </a:solidFill>
+                <a:latin typeface="Segoe UI"/>
+              </a:rPr>
+              <a:t>justo</a:t>
+            </a:r>
+            <a:endParaRPr sz="1700" dirty="0">
+              <a:solidFill>
+                <a:srgbClr val="9AABC4"/>
+              </a:solidFill>
+              <a:latin typeface="Segoe UI"/>
+            </a:endParaRPr>
           </a:p>
         </p:txBody>
       </p:sp>
@@ -17825,7 +19608,7 @@
               </a:lnSpc>
             </a:pPr>
             <a:r>
-              <a:rPr sz="1400" b="1" i="0" spc="260">
+              <a:rPr sz="1400" b="1" i="0" spc="260" dirty="0">
                 <a:solidFill>
                   <a:srgbClr val="22D3EE"/>
                 </a:solidFill>
@@ -18162,7 +19945,7 @@
               </a:lnSpc>
             </a:pPr>
             <a:r>
-              <a:rPr sz="1500">
+              <a:rPr sz="1500" dirty="0">
                 <a:solidFill>
                   <a:srgbClr val="38BDF8"/>
                 </a:solidFill>
@@ -18178,7 +19961,7 @@
               </a:lnSpc>
             </a:pPr>
             <a:r>
-              <a:rPr sz="1500">
+              <a:rPr sz="1500" dirty="0">
                 <a:solidFill>
                   <a:srgbClr val="E8EEF7"/>
                 </a:solidFill>
@@ -18194,7 +19977,7 @@
               </a:lnSpc>
             </a:pPr>
             <a:r>
-              <a:rPr sz="1500">
+              <a:rPr sz="1500" dirty="0">
                 <a:solidFill>
                   <a:srgbClr val="E8EEF7"/>
                 </a:solidFill>
@@ -18210,13 +19993,31 @@
               </a:lnSpc>
             </a:pPr>
             <a:r>
-              <a:rPr sz="1500">
+              <a:rPr sz="1500" dirty="0">
                 <a:solidFill>
                   <a:srgbClr val="E8EEF7"/>
                 </a:solidFill>
                 <a:latin typeface="Consolas"/>
               </a:rPr>
-              <a:t>fs deseada   = 48 kHz</a:t>
+              <a:t>fs </a:t>
+            </a:r>
+            <a:r>
+              <a:rPr sz="1500" dirty="0" err="1">
+                <a:solidFill>
+                  <a:srgbClr val="E8EEF7"/>
+                </a:solidFill>
+                <a:latin typeface="Consolas"/>
+              </a:rPr>
+              <a:t>deseada</a:t>
+            </a:r>
+            <a:r>
+              <a:rPr sz="1500" dirty="0">
+                <a:solidFill>
+                  <a:srgbClr val="E8EEF7"/>
+                </a:solidFill>
+                <a:latin typeface="Consolas"/>
+              </a:rPr>
+              <a:t>   = 48 kHz</a:t>
             </a:r>
           </a:p>
           <a:p>
@@ -18226,7 +20027,7 @@
               </a:lnSpc>
             </a:pPr>
             <a:r>
-              <a:rPr sz="1500">
+              <a:rPr sz="1500" dirty="0">
                 <a:solidFill>
                   <a:srgbClr val="E8EEF7"/>
                 </a:solidFill>
@@ -18242,7 +20043,7 @@
               </a:lnSpc>
             </a:pPr>
             <a:r>
-              <a:rPr sz="1500">
+              <a:rPr sz="1500" dirty="0">
                 <a:solidFill>
                   <a:srgbClr val="34D399"/>
                 </a:solidFill>
@@ -18258,7 +20059,7 @@
               </a:lnSpc>
             </a:pPr>
             <a:r>
-              <a:rPr sz="1500">
+              <a:rPr sz="1500" dirty="0">
                 <a:solidFill>
                   <a:srgbClr val="E8EEF7"/>
                 </a:solidFill>
@@ -18274,7 +20075,7 @@
               </a:lnSpc>
             </a:pPr>
             <a:r>
-              <a:rPr sz="1500">
+              <a:rPr sz="1500" dirty="0">
                 <a:solidFill>
                   <a:srgbClr val="FBBF24"/>
                 </a:solidFill>
